--- a/Docs/ForTheBlind/Visually Imparied Introduction.pptx
+++ b/Docs/ForTheBlind/Visually Imparied Introduction.pptx
@@ -5,7 +5,7 @@
     <p:sldMasterId id="2147483660" r:id="rId1"/>
   </p:sldMasterIdLst>
   <p:notesMasterIdLst>
-    <p:notesMasterId r:id="rId37"/>
+    <p:notesMasterId r:id="rId32"/>
   </p:notesMasterIdLst>
   <p:sldIdLst>
     <p:sldId id="411" r:id="rId2"/>
@@ -31,18 +31,13 @@
     <p:sldId id="403" r:id="rId22"/>
     <p:sldId id="430" r:id="rId23"/>
     <p:sldId id="431" r:id="rId24"/>
-    <p:sldId id="435" r:id="rId25"/>
-    <p:sldId id="432" r:id="rId26"/>
-    <p:sldId id="436" r:id="rId27"/>
-    <p:sldId id="433" r:id="rId28"/>
-    <p:sldId id="437" r:id="rId29"/>
-    <p:sldId id="438" r:id="rId30"/>
-    <p:sldId id="434" r:id="rId31"/>
-    <p:sldId id="439" r:id="rId32"/>
-    <p:sldId id="440" r:id="rId33"/>
-    <p:sldId id="443" r:id="rId34"/>
-    <p:sldId id="444" r:id="rId35"/>
-    <p:sldId id="441" r:id="rId36"/>
+    <p:sldId id="433" r:id="rId25"/>
+    <p:sldId id="434" r:id="rId26"/>
+    <p:sldId id="439" r:id="rId27"/>
+    <p:sldId id="445" r:id="rId28"/>
+    <p:sldId id="440" r:id="rId29"/>
+    <p:sldId id="444" r:id="rId30"/>
+    <p:sldId id="441" r:id="rId31"/>
   </p:sldIdLst>
   <p:sldSz cx="12192000" cy="6858000"/>
   <p:notesSz cx="6858000" cy="9144000"/>
@@ -231,7 +226,7 @@
           <a:p>
             <a:fld id="{656D2E9F-587F-4929-A615-D1B22C008AE4}" type="datetimeFigureOut">
               <a:rPr lang="en-US" smtClean="0"/>
-              <a:t>1/19/2023</a:t>
+              <a:t>9/11/2024</a:t>
             </a:fld>
             <a:endParaRPr lang="en-US" dirty="0"/>
           </a:p>
@@ -662,7 +657,7 @@
                 <a:tabLst/>
                 <a:defRPr/>
               </a:pPr>
-              <a:t>1/19/2023</a:t>
+              <a:t>9/11/2024</a:t>
             </a:fld>
             <a:endParaRPr kumimoji="0" lang="en-US" sz="1200" b="0" i="0" u="none" strike="noStrike" kern="1200" cap="none" spc="0" normalizeH="0" baseline="0" noProof="0" dirty="0">
               <a:ln>
@@ -1102,7 +1097,7 @@
           <a:p>
             <a:fld id="{A596092B-28C7-44D1-B902-5437B333DFB7}" type="datetime1">
               <a:rPr lang="en-US" smtClean="0"/>
-              <a:t>1/19/2023</a:t>
+              <a:t>9/11/2024</a:t>
             </a:fld>
             <a:endParaRPr lang="en-US" dirty="0"/>
           </a:p>
@@ -1253,7 +1248,7 @@
           <a:p>
             <a:fld id="{A596092B-28C7-44D1-B902-5437B333DFB7}" type="datetime1">
               <a:rPr lang="en-US" smtClean="0"/>
-              <a:t>1/19/2023</a:t>
+              <a:t>9/11/2024</a:t>
             </a:fld>
             <a:endParaRPr lang="en-US" dirty="0"/>
           </a:p>
@@ -1481,7 +1476,7 @@
                 <a:tabLst/>
                 <a:defRPr/>
               </a:pPr>
-              <a:t>1/19/2023</a:t>
+              <a:t>9/11/2024</a:t>
             </a:fld>
             <a:endParaRPr kumimoji="0" lang="en-US" sz="1200" b="0" i="0" u="none" strike="noStrike" kern="1200" cap="none" spc="0" normalizeH="0" baseline="0" noProof="0" dirty="0">
               <a:ln>
@@ -1616,7 +1611,7 @@
                 <a:tabLst/>
                 <a:defRPr/>
               </a:pPr>
-              <a:t>35</a:t>
+              <a:t>30</a:t>
             </a:fld>
             <a:endParaRPr kumimoji="0" lang="en-US" sz="1200" b="0" i="0" u="none" strike="noStrike" kern="1200" cap="none" spc="0" normalizeH="0" baseline="0" noProof="0" dirty="0">
               <a:ln>
@@ -1812,7 +1807,7 @@
                 <a:tabLst/>
                 <a:defRPr/>
               </a:pPr>
-              <a:t>1/19/2023</a:t>
+              <a:t>9/11/2024</a:t>
             </a:fld>
             <a:endParaRPr kumimoji="0" lang="en-US" sz="1200" b="0" i="0" u="none" strike="noStrike" kern="1200" cap="none" spc="0" normalizeH="0" baseline="0" noProof="0" dirty="0">
               <a:ln>
@@ -2143,7 +2138,7 @@
                 <a:tabLst/>
                 <a:defRPr/>
               </a:pPr>
-              <a:t>1/19/2023</a:t>
+              <a:t>9/11/2024</a:t>
             </a:fld>
             <a:endParaRPr kumimoji="0" lang="en-US" sz="1200" b="0" i="0" u="none" strike="noStrike" kern="1200" cap="none" spc="0" normalizeH="0" baseline="0" noProof="0" dirty="0">
               <a:ln>
@@ -2474,7 +2469,7 @@
                 <a:tabLst/>
                 <a:defRPr/>
               </a:pPr>
-              <a:t>1/19/2023</a:t>
+              <a:t>9/11/2024</a:t>
             </a:fld>
             <a:endParaRPr kumimoji="0" lang="en-US" sz="1200" b="0" i="0" u="none" strike="noStrike" kern="1200" cap="none" spc="0" normalizeH="0" baseline="0" noProof="0" dirty="0">
               <a:ln>
@@ -2805,7 +2800,7 @@
                 <a:tabLst/>
                 <a:defRPr/>
               </a:pPr>
-              <a:t>1/19/2023</a:t>
+              <a:t>9/11/2024</a:t>
             </a:fld>
             <a:endParaRPr kumimoji="0" lang="en-US" sz="1200" b="0" i="0" u="none" strike="noStrike" kern="1200" cap="none" spc="0" normalizeH="0" baseline="0" noProof="0" dirty="0">
               <a:ln>
@@ -3139,7 +3134,7 @@
                 <a:tabLst/>
                 <a:defRPr/>
               </a:pPr>
-              <a:t>1/19/2023</a:t>
+              <a:t>9/11/2024</a:t>
             </a:fld>
             <a:endParaRPr kumimoji="0" lang="en-US" sz="1200" b="0" i="0" u="none" strike="noStrike" kern="1200" cap="none" spc="0" normalizeH="0" baseline="0" noProof="0" dirty="0">
               <a:ln>
@@ -3470,7 +3465,7 @@
                 <a:tabLst/>
                 <a:defRPr/>
               </a:pPr>
-              <a:t>1/19/2023</a:t>
+              <a:t>9/11/2024</a:t>
             </a:fld>
             <a:endParaRPr kumimoji="0" lang="en-US" sz="1200" b="0" i="0" u="none" strike="noStrike" kern="1200" cap="none" spc="0" normalizeH="0" baseline="0" noProof="0" dirty="0">
               <a:ln>
@@ -3801,7 +3796,7 @@
                 <a:tabLst/>
                 <a:defRPr/>
               </a:pPr>
-              <a:t>1/19/2023</a:t>
+              <a:t>9/11/2024</a:t>
             </a:fld>
             <a:endParaRPr kumimoji="0" lang="en-US" sz="1200" b="0" i="0" u="none" strike="noStrike" kern="1200" cap="none" spc="0" normalizeH="0" baseline="0" noProof="0" dirty="0">
               <a:ln>
@@ -4786,7 +4781,7 @@
           <a:p>
             <a:fld id="{B1DF5501-EE91-4443-9D3B-24E6F28D34E2}" type="datetime1">
               <a:rPr lang="en-US" smtClean="0"/>
-              <a:t>1/19/2023</a:t>
+              <a:t>9/11/2024</a:t>
             </a:fld>
             <a:endParaRPr lang="en-US" dirty="0"/>
           </a:p>
@@ -5052,7 +5047,7 @@
           <a:p>
             <a:fld id="{E954E1E9-8456-43AD-BA28-861520D256B9}" type="datetime1">
               <a:rPr lang="en-US" smtClean="0"/>
-              <a:t>1/19/2023</a:t>
+              <a:t>9/11/2024</a:t>
             </a:fld>
             <a:endParaRPr lang="en-US" dirty="0"/>
           </a:p>
@@ -5370,7 +5365,7 @@
           <a:p>
             <a:fld id="{FAF31E0C-AAFD-4E63-B3AE-16CD757951F4}" type="datetime1">
               <a:rPr lang="en-US" smtClean="0"/>
-              <a:t>1/19/2023</a:t>
+              <a:t>9/11/2024</a:t>
             </a:fld>
             <a:endParaRPr lang="en-US" dirty="0"/>
           </a:p>
@@ -5715,7 +5710,7 @@
           <a:p>
             <a:fld id="{000084FF-4715-4B6E-BD22-453621E5873F}" type="datetime1">
               <a:rPr lang="en-US" smtClean="0"/>
-              <a:t>1/19/2023</a:t>
+              <a:t>9/11/2024</a:t>
             </a:fld>
             <a:endParaRPr lang="en-US" dirty="0"/>
           </a:p>
@@ -6033,7 +6028,7 @@
           <a:p>
             <a:fld id="{6AC37F8D-4DF5-4AB6-A766-5A84B3D74A3B}" type="datetime1">
               <a:rPr lang="en-US" smtClean="0"/>
-              <a:t>1/19/2023</a:t>
+              <a:t>9/11/2024</a:t>
             </a:fld>
             <a:endParaRPr lang="en-US" dirty="0"/>
           </a:p>
@@ -6430,7 +6425,7 @@
           <a:p>
             <a:fld id="{1BF3CD1A-162D-40B2-9B22-9056F77C27F2}" type="datetime1">
               <a:rPr lang="en-US" smtClean="0"/>
-              <a:t>1/19/2023</a:t>
+              <a:t>9/11/2024</a:t>
             </a:fld>
             <a:endParaRPr lang="en-US" dirty="0"/>
           </a:p>
@@ -6604,7 +6599,7 @@
           <a:p>
             <a:fld id="{D42E4200-B1E5-4E39-8279-05DD69810A37}" type="datetime1">
               <a:rPr lang="en-US" smtClean="0"/>
-              <a:t>1/19/2023</a:t>
+              <a:t>9/11/2024</a:t>
             </a:fld>
             <a:endParaRPr lang="en-US" dirty="0"/>
           </a:p>
@@ -6787,7 +6782,7 @@
           <a:p>
             <a:fld id="{47CF7895-00AC-42E5-9790-7B0E3CE09DF2}" type="datetime1">
               <a:rPr lang="en-US" smtClean="0"/>
-              <a:t>1/19/2023</a:t>
+              <a:t>9/11/2024</a:t>
             </a:fld>
             <a:endParaRPr lang="en-US" dirty="0"/>
           </a:p>
@@ -6966,7 +6961,7 @@
           <a:p>
             <a:fld id="{A7119916-CD40-456D-ABE3-55F8822671F7}" type="datetime1">
               <a:rPr lang="en-US" smtClean="0"/>
-              <a:t>1/19/2023</a:t>
+              <a:t>9/11/2024</a:t>
             </a:fld>
             <a:endParaRPr lang="en-US" dirty="0"/>
           </a:p>
@@ -7216,7 +7211,7 @@
           <a:p>
             <a:fld id="{3F9A13D6-B8C2-463B-B3F7-C62E098B328E}" type="datetime1">
               <a:rPr lang="en-US" smtClean="0"/>
-              <a:t>1/19/2023</a:t>
+              <a:t>9/11/2024</a:t>
             </a:fld>
             <a:endParaRPr lang="en-US" dirty="0"/>
           </a:p>
@@ -7451,7 +7446,7 @@
           <a:p>
             <a:fld id="{D2B63420-31EE-4E4B-911C-2601B14D9FDD}" type="datetime1">
               <a:rPr lang="en-US" smtClean="0"/>
-              <a:t>1/19/2023</a:t>
+              <a:t>9/11/2024</a:t>
             </a:fld>
             <a:endParaRPr lang="en-US" dirty="0"/>
           </a:p>
@@ -7828,7 +7823,7 @@
           <a:p>
             <a:fld id="{2DD8986D-86F8-41E6-8CFF-8C91AEF92622}" type="datetime1">
               <a:rPr lang="en-US" smtClean="0"/>
-              <a:t>1/19/2023</a:t>
+              <a:t>9/11/2024</a:t>
             </a:fld>
             <a:endParaRPr lang="en-US" dirty="0"/>
           </a:p>
@@ -7954,7 +7949,7 @@
           <a:p>
             <a:fld id="{BA885161-032E-4C6A-8EDA-39D168DF18E4}" type="datetime1">
               <a:rPr lang="en-US" smtClean="0"/>
-              <a:t>1/19/2023</a:t>
+              <a:t>9/11/2024</a:t>
             </a:fld>
             <a:endParaRPr lang="en-US" dirty="0"/>
           </a:p>
@@ -8052,7 +8047,7 @@
           <a:p>
             <a:fld id="{958E6740-E523-48D9-9C4E-6F218E87BAF3}" type="datetime1">
               <a:rPr lang="en-US" smtClean="0"/>
-              <a:t>1/19/2023</a:t>
+              <a:t>9/11/2024</a:t>
             </a:fld>
             <a:endParaRPr lang="en-US" dirty="0"/>
           </a:p>
@@ -8310,7 +8305,7 @@
           <a:p>
             <a:fld id="{6121D4CA-FF09-4CB8-8D51-2613D19A0F2E}" type="datetime1">
               <a:rPr lang="en-US" smtClean="0"/>
-              <a:t>1/19/2023</a:t>
+              <a:t>9/11/2024</a:t>
             </a:fld>
             <a:endParaRPr lang="en-US" dirty="0"/>
           </a:p>
@@ -8575,7 +8570,7 @@
           <a:p>
             <a:fld id="{8C4779EA-AEA7-43B3-9B65-A77E9A890421}" type="datetime1">
               <a:rPr lang="en-US" smtClean="0"/>
-              <a:t>1/19/2023</a:t>
+              <a:t>9/11/2024</a:t>
             </a:fld>
             <a:endParaRPr lang="en-US" dirty="0"/>
           </a:p>
@@ -9321,7 +9316,7 @@
           <a:p>
             <a:fld id="{059A67F1-3EA0-4026-BE6A-31EE4E1B1DB5}" type="datetime1">
               <a:rPr lang="en-US" smtClean="0"/>
-              <a:t>1/19/2023</a:t>
+              <a:t>9/11/2024</a:t>
             </a:fld>
             <a:endParaRPr lang="en-US" dirty="0"/>
           </a:p>
@@ -9945,7 +9940,7 @@
                 <a:ea typeface="Times New Roman" panose="02020603050405020304" pitchFamily="18" charset="0"/>
                 <a:cs typeface="Times New Roman" panose="02020603050405020304" pitchFamily="18" charset="0"/>
               </a:rPr>
-              <a:t> to the Visually Impaired</a:t>
+              <a:t> to the Blind</a:t>
             </a:r>
             <a:br>
               <a:rPr lang="en-US" sz="6000" kern="1400" spc="-50" dirty="0">
@@ -10075,7 +10070,7 @@
                 <a:tabLst/>
                 <a:defRPr/>
               </a:pPr>
-              <a:t>1/19/2023</a:t>
+              <a:t>9/11/2024</a:t>
             </a:fld>
             <a:endParaRPr kumimoji="0" lang="en-US" sz="900" b="0" i="0" u="none" strike="noStrike" kern="1200" cap="none" spc="0" normalizeH="0" baseline="0" noProof="0" dirty="0">
               <a:ln>
@@ -10326,7 +10321,7 @@
           <a:p>
             <a:fld id="{A7119916-CD40-456D-ABE3-55F8822671F7}" type="datetime1">
               <a:rPr lang="en-US" smtClean="0"/>
-              <a:t>1/19/2023</a:t>
+              <a:t>9/11/2024</a:t>
             </a:fld>
             <a:endParaRPr lang="en-US" dirty="0"/>
           </a:p>
@@ -10626,7 +10621,7 @@
           <a:p>
             <a:fld id="{A7119916-CD40-456D-ABE3-55F8822671F7}" type="datetime1">
               <a:rPr lang="en-US" smtClean="0"/>
-              <a:t>1/19/2023</a:t>
+              <a:t>9/11/2024</a:t>
             </a:fld>
             <a:endParaRPr lang="en-US" dirty="0"/>
           </a:p>
@@ -10852,7 +10847,7 @@
           <a:p>
             <a:fld id="{A7119916-CD40-456D-ABE3-55F8822671F7}" type="datetime1">
               <a:rPr lang="en-US" smtClean="0"/>
-              <a:t>1/19/2023</a:t>
+              <a:t>9/11/2024</a:t>
             </a:fld>
             <a:endParaRPr lang="en-US" dirty="0"/>
           </a:p>
@@ -11172,7 +11167,7 @@
           <a:p>
             <a:fld id="{A7119916-CD40-456D-ABE3-55F8822671F7}" type="datetime1">
               <a:rPr lang="en-US" smtClean="0"/>
-              <a:t>1/19/2023</a:t>
+              <a:t>9/11/2024</a:t>
             </a:fld>
             <a:endParaRPr lang="en-US" dirty="0"/>
           </a:p>
@@ -11399,7 +11394,7 @@
           <a:p>
             <a:fld id="{A7119916-CD40-456D-ABE3-55F8822671F7}" type="datetime1">
               <a:rPr lang="en-US" smtClean="0"/>
-              <a:t>1/19/2023</a:t>
+              <a:t>9/11/2024</a:t>
             </a:fld>
             <a:endParaRPr lang="en-US" dirty="0"/>
           </a:p>
@@ -11551,7 +11546,7 @@
           <a:p>
             <a:fld id="{A7119916-CD40-456D-ABE3-55F8822671F7}" type="datetime1">
               <a:rPr lang="en-US" smtClean="0"/>
-              <a:t>1/19/2023</a:t>
+              <a:t>9/11/2024</a:t>
             </a:fld>
             <a:endParaRPr lang="en-US" dirty="0"/>
           </a:p>
@@ -11783,7 +11778,7 @@
           <a:p>
             <a:fld id="{A7119916-CD40-456D-ABE3-55F8822671F7}" type="datetime1">
               <a:rPr lang="en-US" smtClean="0"/>
-              <a:t>1/19/2023</a:t>
+              <a:t>9/11/2024</a:t>
             </a:fld>
             <a:endParaRPr lang="en-US" dirty="0"/>
           </a:p>
@@ -12121,7 +12116,7 @@
           <a:p>
             <a:fld id="{A7119916-CD40-456D-ABE3-55F8822671F7}" type="datetime1">
               <a:rPr lang="en-US" smtClean="0"/>
-              <a:t>1/19/2023</a:t>
+              <a:t>9/11/2024</a:t>
             </a:fld>
             <a:endParaRPr lang="en-US" dirty="0"/>
           </a:p>
@@ -12265,7 +12260,7 @@
           <a:p>
             <a:fld id="{A7119916-CD40-456D-ABE3-55F8822671F7}" type="datetime1">
               <a:rPr lang="en-US" smtClean="0"/>
-              <a:t>1/19/2023</a:t>
+              <a:t>9/11/2024</a:t>
             </a:fld>
             <a:endParaRPr lang="en-US" dirty="0"/>
           </a:p>
@@ -12438,7 +12433,7 @@
           <a:p>
             <a:fld id="{A7119916-CD40-456D-ABE3-55F8822671F7}" type="datetime1">
               <a:rPr lang="en-US" smtClean="0"/>
-              <a:t>1/19/2023</a:t>
+              <a:t>9/11/2024</a:t>
             </a:fld>
             <a:endParaRPr lang="en-US" dirty="0"/>
           </a:p>
@@ -13136,7 +13131,7 @@
                 <a:tabLst/>
                 <a:defRPr/>
               </a:pPr>
-              <a:t>1/19/2023</a:t>
+              <a:t>9/11/2024</a:t>
             </a:fld>
             <a:endParaRPr kumimoji="0" lang="en-US" sz="900" b="0" i="0" u="none" strike="noStrike" kern="1200" cap="none" spc="0" normalizeH="0" baseline="0" noProof="0" dirty="0">
               <a:ln>
@@ -13597,7 +13592,7 @@
                 <a:tabLst/>
                 <a:defRPr/>
               </a:pPr>
-              <a:t>1/19/2023</a:t>
+              <a:t>9/11/2024</a:t>
             </a:fld>
             <a:endParaRPr kumimoji="0" lang="en-US" sz="900" b="0" i="0" u="none" strike="noStrike" kern="1200" cap="none" spc="0" normalizeH="0" baseline="0" noProof="0" dirty="0">
               <a:ln>
@@ -13964,7 +13959,7 @@
           <a:p>
             <a:fld id="{A7119916-CD40-456D-ABE3-55F8822671F7}" type="datetime1">
               <a:rPr lang="en-US" smtClean="0"/>
-              <a:t>1/19/2023</a:t>
+              <a:t>9/11/2024</a:t>
             </a:fld>
             <a:endParaRPr lang="en-US" dirty="0"/>
           </a:p>
@@ -14153,7 +14148,7 @@
           <a:p>
             <a:fld id="{A7119916-CD40-456D-ABE3-55F8822671F7}" type="datetime1">
               <a:rPr lang="en-US" smtClean="0"/>
-              <a:t>1/19/2023</a:t>
+              <a:t>9/11/2024</a:t>
             </a:fld>
             <a:endParaRPr lang="en-US" dirty="0"/>
           </a:p>
@@ -14429,7 +14424,7 @@
           <a:p>
             <a:fld id="{A7119916-CD40-456D-ABE3-55F8822671F7}" type="datetime1">
               <a:rPr lang="en-US" smtClean="0"/>
-              <a:t>1/19/2023</a:t>
+              <a:t>9/11/2024</a:t>
             </a:fld>
             <a:endParaRPr lang="en-US" dirty="0"/>
           </a:p>
@@ -14620,12 +14615,7 @@
             <p:ph type="title"/>
           </p:nvPr>
         </p:nvSpPr>
-        <p:spPr>
-          <a:xfrm>
-            <a:off x="677334" y="609600"/>
-            <a:ext cx="8596668" cy="942906"/>
-          </a:xfrm>
-        </p:spPr>
+        <p:spPr/>
         <p:txBody>
           <a:bodyPr/>
           <a:lstStyle/>
@@ -14670,45 +14660,93 @@
           </a:bodyPr>
           <a:lstStyle/>
           <a:p>
+            <a:r>
+              <a:rPr lang="en-US" sz="3200" dirty="0">
+                <a:solidFill>
+                  <a:schemeClr val="tx1"/>
+                </a:solidFill>
+              </a:rPr>
+              <a:t>for Turtle function </a:t>
+            </a:r>
+            <a:r>
+              <a:rPr lang="en-US" sz="3200" b="1" dirty="0">
+                <a:solidFill>
+                  <a:schemeClr val="tx1"/>
+                </a:solidFill>
+              </a:rPr>
+              <a:t>done</a:t>
+            </a:r>
+            <a:r>
+              <a:rPr lang="en-US" sz="3200" dirty="0">
+                <a:solidFill>
+                  <a:schemeClr val="tx1"/>
+                </a:solidFill>
+              </a:rPr>
+              <a:t> or </a:t>
+            </a:r>
+            <a:r>
+              <a:rPr lang="en-US" sz="3200" b="1" dirty="0">
+                <a:solidFill>
+                  <a:schemeClr val="tx1"/>
+                </a:solidFill>
+              </a:rPr>
+              <a:t>mainloop</a:t>
+            </a:r>
+          </a:p>
+          <a:p>
             <a:pPr lvl="1"/>
             <a:r>
-              <a:rPr lang="en-US" sz="3600" dirty="0">
+              <a:rPr lang="en-US" sz="3000" dirty="0">
                 <a:solidFill>
                   <a:schemeClr val="tx1"/>
                 </a:solidFill>
               </a:rPr>
-              <a:t>Shadow functions for each Turtle function</a:t>
+              <a:t>If print braille:</a:t>
+            </a:r>
+          </a:p>
+          <a:p>
+            <a:pPr lvl="2"/>
+            <a:r>
+              <a:rPr lang="en-US" sz="2800" dirty="0">
+                <a:solidFill>
+                  <a:schemeClr val="tx1"/>
+                </a:solidFill>
+              </a:rPr>
+              <a:t>Generate text picture from display cells</a:t>
             </a:r>
           </a:p>
           <a:p>
             <a:pPr lvl="1"/>
             <a:r>
-              <a:rPr lang="en-US" sz="3600" dirty="0">
+              <a:rPr lang="en-US" sz="3200" dirty="0">
                 <a:solidFill>
                   <a:schemeClr val="tx1"/>
                 </a:solidFill>
               </a:rPr>
-              <a:t>Sample points for each visible graphic – e.g. line</a:t>
-            </a:r>
-          </a:p>
-          <a:p>
-            <a:pPr lvl="1"/>
-            <a:r>
-              <a:rPr lang="en-US" sz="3600" dirty="0">
+              <a:t>If braille window:</a:t>
+            </a:r>
+          </a:p>
+          <a:p>
+            <a:pPr lvl="2"/>
+            <a:r>
+              <a:rPr lang="en-US" sz="2800" dirty="0">
                 <a:solidFill>
                   <a:schemeClr val="tx1"/>
                 </a:solidFill>
               </a:rPr>
-              <a:t>Create cells to display from points</a:t>
-            </a:r>
-          </a:p>
-          <a:p>
-            <a:pPr lvl="1"/>
-            <a:endParaRPr lang="en-US" sz="3000" dirty="0">
-              <a:solidFill>
-                <a:schemeClr val="accent1"/>
-              </a:solidFill>
-            </a:endParaRPr>
+              <a:t>Create Braille Window Display</a:t>
+            </a:r>
+          </a:p>
+          <a:p>
+            <a:pPr lvl="2"/>
+            <a:r>
+              <a:rPr lang="en-US" sz="2800" dirty="0">
+                <a:solidFill>
+                  <a:schemeClr val="tx1"/>
+                </a:solidFill>
+              </a:rPr>
+              <a:t>Populate with Braille Cells </a:t>
+            </a:r>
           </a:p>
         </p:txBody>
       </p:sp>
@@ -14735,7 +14773,7 @@
           <a:p>
             <a:fld id="{A7119916-CD40-456D-ABE3-55F8822671F7}" type="datetime1">
               <a:rPr lang="en-US" smtClean="0"/>
-              <a:t>1/19/2023</a:t>
+              <a:t>9/11/2024</a:t>
             </a:fld>
             <a:endParaRPr lang="en-US" dirty="0"/>
           </a:p>
@@ -14849,7 +14887,7 @@
     </p:spTree>
     <p:extLst>
       <p:ext uri="{BB962C8B-B14F-4D97-AF65-F5344CB8AC3E}">
-        <p14:creationId xmlns:p14="http://schemas.microsoft.com/office/powerpoint/2010/main" val="1744733904"/>
+        <p14:creationId xmlns:p14="http://schemas.microsoft.com/office/powerpoint/2010/main" val="2402313255"/>
       </p:ext>
     </p:extLst>
   </p:cSld>
@@ -14937,7 +14975,7 @@
                   <a:schemeClr val="accent1"/>
                 </a:solidFill>
               </a:rPr>
-              <a:t>The Plan continued…</a:t>
+              <a:t>Braille Display, with Audio Feedback</a:t>
             </a:r>
             <a:endParaRPr lang="en-US" dirty="0"/>
           </a:p>
@@ -14972,60 +15010,68 @@
           <a:lstStyle/>
           <a:p>
             <a:r>
-              <a:rPr lang="en-US" sz="3600" dirty="0">
+              <a:rPr lang="en-US" sz="2800" dirty="0">
                 <a:solidFill>
                   <a:schemeClr val="tx1"/>
                 </a:solidFill>
               </a:rPr>
-              <a:t>for each user Turtle function call</a:t>
+              <a:t>Initially only a diagnostic aid</a:t>
+            </a:r>
+          </a:p>
+          <a:p>
+            <a:r>
+              <a:rPr lang="en-US" sz="2800" dirty="0">
+                <a:solidFill>
+                  <a:schemeClr val="tx1"/>
+                </a:solidFill>
+              </a:rPr>
+              <a:t>Python module tkinter - Canvas, Menu</a:t>
+            </a:r>
+          </a:p>
+          <a:p>
+            <a:r>
+              <a:rPr lang="en-US" sz="2800" dirty="0">
+                <a:solidFill>
+                  <a:schemeClr val="tx1"/>
+                </a:solidFill>
+              </a:rPr>
+              <a:t>Display cells created during drawing phase</a:t>
             </a:r>
           </a:p>
           <a:p>
             <a:pPr lvl="1"/>
             <a:r>
-              <a:rPr lang="en-US" sz="3600" dirty="0">
+              <a:rPr lang="en-US" sz="2600" dirty="0">
                 <a:solidFill>
                   <a:schemeClr val="tx1"/>
                 </a:solidFill>
               </a:rPr>
-              <a:t>Call Turtle's function </a:t>
-            </a:r>
-            <a:r>
-              <a:rPr lang="en-US" sz="3600" dirty="0">
+              <a:t>Dictionary by (cell-x-index, cell-y-index)</a:t>
+            </a:r>
+          </a:p>
+          <a:p>
+            <a:pPr lvl="1"/>
+            <a:r>
+              <a:rPr lang="en-US" sz="2600" dirty="0">
                 <a:solidFill>
                   <a:schemeClr val="tx1"/>
                 </a:solidFill>
-                <a:sym typeface="Wingdings" panose="05000000000000000000" pitchFamily="2" charset="2"/>
               </a:rPr>
-              <a:t></a:t>
-            </a:r>
-            <a:r>
-              <a:rPr lang="en-US" sz="3600" dirty="0">
+              <a:t>Much energy changing  between coordinates:</a:t>
+            </a:r>
+          </a:p>
+          <a:p>
+            <a:pPr marL="914400" lvl="2" indent="0">
+              <a:buNone/>
+            </a:pPr>
+            <a:r>
+              <a:rPr lang="en-US" sz="2400" dirty="0">
                 <a:solidFill>
                   <a:schemeClr val="tx1"/>
                 </a:solidFill>
               </a:rPr>
-              <a:t>Turtle graphic</a:t>
-            </a:r>
-          </a:p>
-          <a:p>
-            <a:pPr lvl="1"/>
-            <a:r>
-              <a:rPr lang="en-US" sz="3600" dirty="0">
-                <a:solidFill>
-                  <a:schemeClr val="tx1"/>
-                </a:solidFill>
-              </a:rPr>
-              <a:t>Call shadow function(s)</a:t>
-            </a:r>
-          </a:p>
-          <a:p>
-            <a:pPr lvl="1"/>
-            <a:endParaRPr lang="en-US" sz="3000" dirty="0">
-              <a:solidFill>
-                <a:schemeClr val="tx1"/>
-              </a:solidFill>
-            </a:endParaRPr>
+              <a:t> canvas – turtle – cell-indices</a:t>
+            </a:r>
           </a:p>
         </p:txBody>
       </p:sp>
@@ -15052,7 +15098,7 @@
           <a:p>
             <a:fld id="{A7119916-CD40-456D-ABE3-55F8822671F7}" type="datetime1">
               <a:rPr lang="en-US" smtClean="0"/>
-              <a:t>1/19/2023</a:t>
+              <a:t>9/11/2024</a:t>
             </a:fld>
             <a:endParaRPr lang="en-US" dirty="0"/>
           </a:p>
@@ -15166,7 +15212,7 @@
     </p:spTree>
     <p:extLst>
       <p:ext uri="{BB962C8B-B14F-4D97-AF65-F5344CB8AC3E}">
-        <p14:creationId xmlns:p14="http://schemas.microsoft.com/office/powerpoint/2010/main" val="414912413"/>
+        <p14:creationId xmlns:p14="http://schemas.microsoft.com/office/powerpoint/2010/main" val="4035209992"/>
       </p:ext>
     </p:extLst>
   </p:cSld>
@@ -15245,16 +15291,34 @@
         </p:nvSpPr>
         <p:spPr/>
         <p:txBody>
-          <a:bodyPr/>
-          <a:lstStyle/>
-          <a:p>
+          <a:bodyPr>
+            <a:normAutofit/>
+          </a:bodyPr>
+          <a:lstStyle/>
+          <a:p>
+            <a:pPr algn="ctr"/>
             <a:r>
               <a:rPr lang="en-US" sz="3600" dirty="0">
                 <a:solidFill>
                   <a:schemeClr val="accent1"/>
                 </a:solidFill>
               </a:rPr>
-              <a:t>The Plan continued…</a:t>
+              <a:t>Strategy for Display Cells</a:t>
+            </a:r>
+            <a:br>
+              <a:rPr lang="en-US" sz="3600" dirty="0">
+                <a:solidFill>
+                  <a:schemeClr val="accent1"/>
+                </a:solidFill>
+              </a:rPr>
+            </a:br>
+            <a:r>
+              <a:rPr lang="en-US" sz="3600" dirty="0">
+                <a:solidFill>
+                  <a:schemeClr val="accent1"/>
+                </a:solidFill>
+              </a:rPr>
+              <a:t>Not first try</a:t>
             </a:r>
             <a:endParaRPr lang="en-US" dirty="0"/>
           </a:p>
@@ -15284,58 +15348,61 @@
         </p:spPr>
         <p:txBody>
           <a:bodyPr>
-            <a:normAutofit/>
+            <a:normAutofit lnSpcReduction="10000"/>
           </a:bodyPr>
           <a:lstStyle/>
           <a:p>
-            <a:pPr marL="457200" lvl="1" indent="0">
-              <a:buNone/>
-            </a:pPr>
-            <a:r>
-              <a:rPr lang="en-US" sz="3600" dirty="0">
+            <a:r>
+              <a:rPr lang="en-US" sz="3200" dirty="0">
                 <a:solidFill>
                   <a:schemeClr val="tx1"/>
                 </a:solidFill>
               </a:rPr>
-              <a:t>Shadow function – e.g. add_line()</a:t>
-            </a:r>
-          </a:p>
-          <a:p>
-            <a:pPr lvl="2"/>
-            <a:r>
-              <a:rPr lang="en-US" sz="3600" dirty="0">
+              <a:t>Let most Turtle calls go through unchanged</a:t>
+            </a:r>
+          </a:p>
+          <a:p>
+            <a:r>
+              <a:rPr lang="en-US" sz="3200" dirty="0">
                 <a:solidFill>
                   <a:schemeClr val="tx1"/>
                 </a:solidFill>
               </a:rPr>
-              <a:t>Update shadow state - e.g. color</a:t>
-            </a:r>
-          </a:p>
-          <a:p>
-            <a:pPr lvl="2"/>
-            <a:r>
-              <a:rPr lang="en-US" sz="3600" dirty="0">
+              <a:t>Scan created Tkinter Canvas</a:t>
+            </a:r>
+          </a:p>
+          <a:p>
+            <a:r>
+              <a:rPr lang="en-US" sz="3200" dirty="0">
                 <a:solidFill>
                   <a:schemeClr val="tx1"/>
                 </a:solidFill>
               </a:rPr>
-              <a:t>Create sample points at a higher resolution than display grid</a:t>
-            </a:r>
-          </a:p>
-          <a:p>
-            <a:pPr lvl="2"/>
-            <a:r>
-              <a:rPr lang="en-US" sz="3600" dirty="0">
+              <a:t>Divide up canvas into display regions (40x25)</a:t>
+            </a:r>
+          </a:p>
+          <a:p>
+            <a:r>
+              <a:rPr lang="en-US" sz="3200" dirty="0">
                 <a:solidFill>
                   <a:schemeClr val="tx1"/>
                 </a:solidFill>
               </a:rPr>
-              <a:t>Add new display cell for each new point</a:t>
-            </a:r>
-          </a:p>
-          <a:p>
-            <a:pPr lvl="1"/>
-            <a:endParaRPr lang="en-US" sz="3000" dirty="0">
+              <a:t>For each region find overlapping Canvas items</a:t>
+            </a:r>
+          </a:p>
+          <a:p>
+            <a:r>
+              <a:rPr lang="en-US" sz="3200" dirty="0">
+                <a:solidFill>
+                  <a:schemeClr val="tx1"/>
+                </a:solidFill>
+              </a:rPr>
+              <a:t>Where found – create a display cell</a:t>
+            </a:r>
+          </a:p>
+          <a:p>
+            <a:endParaRPr lang="en-US" sz="2400" dirty="0">
               <a:solidFill>
                 <a:schemeClr val="accent1"/>
               </a:solidFill>
@@ -15366,7 +15433,7 @@
           <a:p>
             <a:fld id="{A7119916-CD40-456D-ABE3-55F8822671F7}" type="datetime1">
               <a:rPr lang="en-US" smtClean="0"/>
-              <a:t>1/19/2023</a:t>
+              <a:t>9/11/2024</a:t>
             </a:fld>
             <a:endParaRPr lang="en-US" dirty="0"/>
           </a:p>
@@ -15480,7 +15547,7 @@
     </p:spTree>
     <p:extLst>
       <p:ext uri="{BB962C8B-B14F-4D97-AF65-F5344CB8AC3E}">
-        <p14:creationId xmlns:p14="http://schemas.microsoft.com/office/powerpoint/2010/main" val="1028587879"/>
+        <p14:creationId xmlns:p14="http://schemas.microsoft.com/office/powerpoint/2010/main" val="496217816"/>
       </p:ext>
     </p:extLst>
   </p:cSld>
@@ -15568,7 +15635,7 @@
                   <a:schemeClr val="accent1"/>
                 </a:solidFill>
               </a:rPr>
-              <a:t>The Plan continued…</a:t>
+              <a:t>Strategy continued</a:t>
             </a:r>
             <a:endParaRPr lang="en-US" dirty="0"/>
           </a:p>
@@ -15598,96 +15665,50 @@
         </p:spPr>
         <p:txBody>
           <a:bodyPr>
-            <a:normAutofit/>
+            <a:noAutofit/>
           </a:bodyPr>
           <a:lstStyle/>
           <a:p>
             <a:r>
-              <a:rPr lang="en-US" sz="3200" dirty="0">
+              <a:rPr lang="en-US" sz="3600" dirty="0">
                 <a:solidFill>
                   <a:schemeClr val="tx1"/>
                 </a:solidFill>
               </a:rPr>
-              <a:t>for Turtle function </a:t>
-            </a:r>
-            <a:r>
-              <a:rPr lang="en-US" sz="3200" b="1" dirty="0">
+              <a:t>Benefits:</a:t>
+            </a:r>
+          </a:p>
+          <a:p>
+            <a:pPr lvl="1"/>
+            <a:r>
+              <a:rPr lang="en-US" sz="3600" dirty="0">
                 <a:solidFill>
                   <a:schemeClr val="tx1"/>
                 </a:solidFill>
               </a:rPr>
-              <a:t>done</a:t>
-            </a:r>
-            <a:r>
-              <a:rPr lang="en-US" sz="3200" dirty="0">
+              <a:t>Uses tkinter powerful scanning</a:t>
+            </a:r>
+          </a:p>
+          <a:p>
+            <a:pPr lvl="1"/>
+            <a:r>
+              <a:rPr lang="en-US" sz="3600" dirty="0">
                 <a:solidFill>
                   <a:schemeClr val="tx1"/>
                 </a:solidFill>
               </a:rPr>
-              <a:t> or </a:t>
-            </a:r>
-            <a:r>
-              <a:rPr lang="en-US" sz="3200" b="1" dirty="0">
+              <a:t>Applicable to non-turtle tkinter programs</a:t>
+            </a:r>
+          </a:p>
+          <a:p>
+            <a:pPr lvl="1"/>
+            <a:r>
+              <a:rPr lang="en-US" sz="3600" dirty="0">
                 <a:solidFill>
                   <a:schemeClr val="tx1"/>
                 </a:solidFill>
               </a:rPr>
-              <a:t>mainloop</a:t>
-            </a:r>
-          </a:p>
-          <a:p>
-            <a:pPr lvl="1"/>
-            <a:r>
-              <a:rPr lang="en-US" sz="3000" dirty="0">
-                <a:solidFill>
-                  <a:schemeClr val="tx1"/>
-                </a:solidFill>
-              </a:rPr>
-              <a:t>If print braille:</a:t>
-            </a:r>
-          </a:p>
-          <a:p>
-            <a:pPr lvl="2"/>
-            <a:r>
-              <a:rPr lang="en-US" sz="2800" dirty="0">
-                <a:solidFill>
-                  <a:schemeClr val="tx1"/>
-                </a:solidFill>
-              </a:rPr>
-              <a:t>Generate text picture from display cells</a:t>
-            </a:r>
-          </a:p>
-          <a:p>
-            <a:pPr lvl="1"/>
-            <a:r>
-              <a:rPr lang="en-US" sz="3200" dirty="0">
-                <a:solidFill>
-                  <a:schemeClr val="tx1"/>
-                </a:solidFill>
-              </a:rPr>
-              <a:t>If braille window:</a:t>
-            </a:r>
-          </a:p>
-          <a:p>
-            <a:pPr lvl="2"/>
-            <a:r>
-              <a:rPr lang="en-US" sz="2800" dirty="0">
-                <a:solidFill>
-                  <a:schemeClr val="tx1"/>
-                </a:solidFill>
-              </a:rPr>
-              <a:t>Create Braille Window Display</a:t>
-            </a:r>
-          </a:p>
-          <a:p>
-            <a:pPr lvl="2"/>
-            <a:r>
-              <a:rPr lang="en-US" sz="2800" dirty="0">
-                <a:solidFill>
-                  <a:schemeClr val="tx1"/>
-                </a:solidFill>
-              </a:rPr>
-              <a:t>Populate with Braille Cells </a:t>
+              <a:t>Facilitates scale changes</a:t>
             </a:r>
           </a:p>
         </p:txBody>
@@ -15715,7 +15736,7 @@
           <a:p>
             <a:fld id="{A7119916-CD40-456D-ABE3-55F8822671F7}" type="datetime1">
               <a:rPr lang="en-US" smtClean="0"/>
-              <a:t>1/19/2023</a:t>
+              <a:t>9/11/2024</a:t>
             </a:fld>
             <a:endParaRPr lang="en-US" dirty="0"/>
           </a:p>
@@ -15829,7 +15850,7 @@
     </p:spTree>
     <p:extLst>
       <p:ext uri="{BB962C8B-B14F-4D97-AF65-F5344CB8AC3E}">
-        <p14:creationId xmlns:p14="http://schemas.microsoft.com/office/powerpoint/2010/main" val="2402313255"/>
+        <p14:creationId xmlns:p14="http://schemas.microsoft.com/office/powerpoint/2010/main" val="3037298725"/>
       </p:ext>
     </p:extLst>
   </p:cSld>
@@ -15917,7 +15938,7 @@
                   <a:schemeClr val="accent1"/>
                 </a:solidFill>
               </a:rPr>
-              <a:t>Turtle Graphic to Display Cells</a:t>
+              <a:t>Change display</a:t>
             </a:r>
             <a:endParaRPr lang="en-US" dirty="0"/>
           </a:p>
@@ -15941,113 +15962,64 @@
         </p:nvSpPr>
         <p:spPr>
           <a:xfrm>
-            <a:off x="550113" y="1532771"/>
-            <a:ext cx="8596668" cy="4399053"/>
+            <a:off x="550113" y="2051051"/>
+            <a:ext cx="8596668" cy="3880773"/>
           </a:xfrm>
         </p:spPr>
         <p:txBody>
           <a:bodyPr>
-            <a:normAutofit fontScale="92500"/>
+            <a:noAutofit/>
           </a:bodyPr>
           <a:lstStyle/>
           <a:p>
             <a:r>
-              <a:rPr lang="en-US" sz="2800" dirty="0">
+              <a:rPr lang="en-US" sz="3600" dirty="0">
                 <a:solidFill>
                   <a:schemeClr val="tx1"/>
                 </a:solidFill>
               </a:rPr>
-              <a:t>Shadow call e.g. add_line</a:t>
+              <a:t>tkinter – not screen reader friendly</a:t>
+            </a:r>
+          </a:p>
+          <a:p>
+            <a:r>
+              <a:rPr lang="en-US" sz="3600" dirty="0">
+                <a:solidFill>
+                  <a:schemeClr val="tx1"/>
+                </a:solidFill>
+              </a:rPr>
+              <a:t>wxPython is screen reader friendly</a:t>
+            </a:r>
+          </a:p>
+          <a:p>
+            <a:r>
+              <a:rPr lang="en-US" sz="3600" dirty="0">
+                <a:solidFill>
+                  <a:schemeClr val="tx1"/>
+                </a:solidFill>
+              </a:rPr>
+              <a:t>Turtle (using tkinter) still useful</a:t>
+            </a:r>
+          </a:p>
+          <a:p>
+            <a:r>
+              <a:rPr lang="en-US" sz="3600" dirty="0">
+                <a:solidFill>
+                  <a:schemeClr val="tx1"/>
+                </a:solidFill>
+              </a:rPr>
+              <a:t>Use two processes</a:t>
             </a:r>
           </a:p>
           <a:p>
             <a:pPr lvl="1"/>
             <a:r>
-              <a:rPr lang="en-US" sz="2800" dirty="0">
+              <a:rPr lang="en-US" sz="3400" dirty="0">
                 <a:solidFill>
                   <a:schemeClr val="tx1"/>
                 </a:solidFill>
               </a:rPr>
-              <a:t>Graphic region sample points</a:t>
-            </a:r>
-          </a:p>
-          <a:p>
-            <a:pPr marL="1428750" lvl="2" indent="-514350">
-              <a:buFont typeface="+mj-lt"/>
-              <a:buAutoNum type="arabicPeriod"/>
-            </a:pPr>
-            <a:r>
-              <a:rPr lang="en-US" sz="2800" dirty="0">
-                <a:solidFill>
-                  <a:schemeClr val="tx1"/>
-                </a:solidFill>
-              </a:rPr>
-              <a:t>Add points from spaced points on perimeter</a:t>
-            </a:r>
-          </a:p>
-          <a:p>
-            <a:pPr marL="1428750" lvl="2" indent="-514350">
-              <a:buFont typeface="+mj-lt"/>
-              <a:buAutoNum type="arabicPeriod"/>
-            </a:pPr>
-            <a:r>
-              <a:rPr lang="en-US" sz="2800" dirty="0">
-                <a:solidFill>
-                  <a:schemeClr val="tx1"/>
-                </a:solidFill>
-              </a:rPr>
-              <a:t>Divide region into triangles</a:t>
-            </a:r>
-          </a:p>
-          <a:p>
-            <a:pPr marL="1428750" lvl="2" indent="-514350">
-              <a:buFont typeface="+mj-lt"/>
-              <a:buAutoNum type="arabicPeriod"/>
-            </a:pPr>
-            <a:r>
-              <a:rPr lang="en-US" sz="2800" dirty="0">
-                <a:solidFill>
-                  <a:schemeClr val="tx1"/>
-                </a:solidFill>
-              </a:rPr>
-              <a:t>Add in points from each triangle</a:t>
-            </a:r>
-          </a:p>
-          <a:p>
-            <a:pPr lvl="1"/>
-            <a:r>
-              <a:rPr lang="en-US" sz="2800" dirty="0">
-                <a:solidFill>
-                  <a:schemeClr val="tx1"/>
-                </a:solidFill>
-              </a:rPr>
-              <a:t>For each sample point</a:t>
-            </a:r>
-          </a:p>
-          <a:p>
-            <a:pPr marL="914400" lvl="2" indent="0">
-              <a:buNone/>
-            </a:pPr>
-            <a:r>
-              <a:rPr lang="en-US" sz="2800" dirty="0">
-                <a:solidFill>
-                  <a:schemeClr val="tx1"/>
-                </a:solidFill>
-              </a:rPr>
-              <a:t>If point not inside any display cell:</a:t>
-            </a:r>
-          </a:p>
-          <a:p>
-            <a:pPr marL="1371600" lvl="3" indent="0">
-              <a:buNone/>
-            </a:pPr>
-            <a:r>
-              <a:rPr lang="en-US" sz="2800" dirty="0">
-                <a:solidFill>
-                  <a:schemeClr val="tx1"/>
-                </a:solidFill>
-              </a:rPr>
-              <a:t>Create new display cell</a:t>
+              <a:t>Need communication</a:t>
             </a:r>
           </a:p>
         </p:txBody>
@@ -16075,7 +16047,7 @@
           <a:p>
             <a:fld id="{A7119916-CD40-456D-ABE3-55F8822671F7}" type="datetime1">
               <a:rPr lang="en-US" smtClean="0"/>
-              <a:t>1/19/2023</a:t>
+              <a:t>9/11/2024</a:t>
             </a:fld>
             <a:endParaRPr lang="en-US" dirty="0"/>
           </a:p>
@@ -16189,7 +16161,7 @@
     </p:spTree>
     <p:extLst>
       <p:ext uri="{BB962C8B-B14F-4D97-AF65-F5344CB8AC3E}">
-        <p14:creationId xmlns:p14="http://schemas.microsoft.com/office/powerpoint/2010/main" val="96972320"/>
+        <p14:creationId xmlns:p14="http://schemas.microsoft.com/office/powerpoint/2010/main" val="4097782202"/>
       </p:ext>
     </p:extLst>
   </p:cSld>
@@ -16272,10 +16244,14 @@
           <a:lstStyle/>
           <a:p>
             <a:r>
-              <a:rPr lang="en-US" dirty="0"/>
-              <a:t>Triangle to sample points</a:t>
-            </a:r>
-            <a:endParaRPr lang="en-US" sz="2400" dirty="0"/>
+              <a:rPr lang="en-US" sz="3600" dirty="0">
+                <a:solidFill>
+                  <a:schemeClr val="accent1"/>
+                </a:solidFill>
+              </a:rPr>
+              <a:t>Source Code</a:t>
+            </a:r>
+            <a:endParaRPr lang="en-US" dirty="0"/>
           </a:p>
         </p:txBody>
       </p:sp>
@@ -16297,43 +16273,83 @@
         </p:nvSpPr>
         <p:spPr>
           <a:xfrm>
-            <a:off x="550113" y="1532771"/>
-            <a:ext cx="8596668" cy="4399053"/>
+            <a:off x="550113" y="2051051"/>
+            <a:ext cx="8596668" cy="3880773"/>
           </a:xfrm>
         </p:spPr>
         <p:txBody>
           <a:bodyPr>
-            <a:normAutofit/>
+            <a:noAutofit/>
           </a:bodyPr>
           <a:lstStyle/>
           <a:p>
             <a:r>
-              <a:rPr lang="en-US" sz="3600" dirty="0">
+              <a:rPr lang="en-US" sz="2800" dirty="0">
                 <a:solidFill>
                   <a:schemeClr val="tx1"/>
                 </a:solidFill>
               </a:rPr>
-              <a:t>Add in spaced points on perimeter</a:t>
-            </a:r>
-          </a:p>
-          <a:p>
-            <a:r>
-              <a:rPr lang="en-US" sz="3600" dirty="0">
+              <a:t>GitHub Project </a:t>
+            </a:r>
+            <a:r>
+              <a:rPr lang="en-US" sz="2800" dirty="0">
+                <a:solidFill>
+                  <a:srgbClr val="00B0F0"/>
+                </a:solidFill>
+              </a:rPr>
+              <a:t>github.com/raysmith619/resource_lib</a:t>
+            </a:r>
+          </a:p>
+          <a:p>
+            <a:pPr marL="457200" lvl="1" indent="0">
+              <a:buNone/>
+            </a:pPr>
+            <a:r>
+              <a:rPr lang="en-US" sz="3400" dirty="0">
+                <a:solidFill>
+                  <a:srgbClr val="00B0F0"/>
+                </a:solidFill>
+              </a:rPr>
+              <a:t>src/ </a:t>
+            </a:r>
+            <a:r>
+              <a:rPr lang="en-US" sz="3400" dirty="0">
                 <a:solidFill>
                   <a:schemeClr val="tx1"/>
                 </a:solidFill>
               </a:rPr>
-              <a:t>Divide triangle horizontally by spaced vertical lines</a:t>
-            </a:r>
-          </a:p>
-          <a:p>
-            <a:r>
-              <a:rPr lang="en-US" sz="3600" dirty="0">
+              <a:t>– source files (Python)</a:t>
+            </a:r>
+          </a:p>
+          <a:p>
+            <a:pPr marL="457200" lvl="1" indent="0">
+              <a:buNone/>
+            </a:pPr>
+            <a:r>
+              <a:rPr lang="en-US" sz="3400" dirty="0">
+                <a:solidFill>
+                  <a:srgbClr val="00B0F0"/>
+                </a:solidFill>
+              </a:rPr>
+              <a:t>README.md </a:t>
+            </a:r>
+            <a:r>
+              <a:rPr lang="en-US" sz="3400" dirty="0">
                 <a:solidFill>
                   <a:schemeClr val="tx1"/>
                 </a:solidFill>
               </a:rPr>
-              <a:t>Add in spaced points on each vertical line</a:t>
+              <a:t>– Short description</a:t>
+            </a:r>
+          </a:p>
+          <a:p>
+            <a:r>
+              <a:rPr lang="en-US" sz="2400" dirty="0">
+                <a:solidFill>
+                  <a:schemeClr val="tx1"/>
+                </a:solidFill>
+              </a:rPr>
+              <a:t>Alternate direction, with discussion</a:t>
             </a:r>
           </a:p>
           <a:p>
@@ -16341,13 +16357,57 @@
               <a:buNone/>
             </a:pPr>
             <a:r>
-              <a:rPr lang="en-US" sz="3600" dirty="0">
-                <a:solidFill>
-                  <a:schemeClr val="tx1"/>
-                </a:solidFill>
+              <a:rPr lang="en-US" sz="2400" b="0" i="0" u="sng" dirty="0">
+                <a:solidFill>
+                  <a:srgbClr val="00B0F0"/>
+                </a:solidFill>
+                <a:effectLst/>
+                <a:latin typeface="-apple-system"/>
+                <a:hlinkClick r:id="rId2">
+                  <a:extLst>
+                    <a:ext uri="{A12FA001-AC4F-418D-AE19-62706E023703}">
+                      <ahyp:hlinkClr xmlns:ahyp="http://schemas.microsoft.com/office/drawing/2018/hyperlinkcolor" val="tx"/>
+                    </a:ext>
+                  </a:extLst>
+                </a:hlinkClick>
               </a:rPr>
-              <a:t>NOTE: Over sampling does not hurt … much</a:t>
-            </a:r>
+              <a:t>raysmith619</a:t>
+            </a:r>
+            <a:r>
+              <a:rPr lang="en-US" sz="2400" b="0" i="0" dirty="0">
+                <a:solidFill>
+                  <a:srgbClr val="00B0F0"/>
+                </a:solidFill>
+                <a:effectLst/>
+                <a:latin typeface="-apple-system"/>
+              </a:rPr>
+              <a:t>/</a:t>
+            </a:r>
+            <a:r>
+              <a:rPr lang="en-US" sz="2400" b="1" i="0" u="none" strike="noStrike" dirty="0">
+                <a:solidFill>
+                  <a:srgbClr val="00B0F0"/>
+                </a:solidFill>
+                <a:effectLst/>
+                <a:latin typeface="-apple-system"/>
+                <a:hlinkClick r:id="rId3">
+                  <a:extLst>
+                    <a:ext uri="{A12FA001-AC4F-418D-AE19-62706E023703}">
+                      <ahyp:hlinkClr xmlns:ahyp="http://schemas.microsoft.com/office/drawing/2018/hyperlinkcolor" val="tx"/>
+                    </a:ext>
+                  </a:extLst>
+                </a:hlinkClick>
+              </a:rPr>
+              <a:t>TurtleBraille</a:t>
+            </a:r>
+            <a:br>
+              <a:rPr lang="en-US" sz="3600" dirty="0"/>
+            </a:br>
+            <a:endParaRPr lang="en-US" sz="3600" dirty="0">
+              <a:solidFill>
+                <a:schemeClr val="tx1"/>
+              </a:solidFill>
+            </a:endParaRPr>
           </a:p>
         </p:txBody>
       </p:sp>
@@ -16374,7 +16434,7 @@
           <a:p>
             <a:fld id="{A7119916-CD40-456D-ABE3-55F8822671F7}" type="datetime1">
               <a:rPr lang="en-US" smtClean="0"/>
-              <a:t>1/19/2023</a:t>
+              <a:t>9/11/2024</a:t>
             </a:fld>
             <a:endParaRPr lang="en-US" dirty="0"/>
           </a:p>
@@ -16453,7 +16513,7 @@
           <p:nvPr/>
         </p:nvPicPr>
         <p:blipFill>
-          <a:blip r:embed="rId2">
+          <a:blip r:embed="rId4">
             <a:extLst>
               <a:ext uri="{28A0092B-C50C-407E-A947-70E740481C1C}">
                 <a14:useLocalDpi xmlns:a14="http://schemas.microsoft.com/office/drawing/2010/main" val="0"/>
@@ -16488,7 +16548,7 @@
     </p:spTree>
     <p:extLst>
       <p:ext uri="{BB962C8B-B14F-4D97-AF65-F5344CB8AC3E}">
-        <p14:creationId xmlns:p14="http://schemas.microsoft.com/office/powerpoint/2010/main" val="1629017314"/>
+        <p14:creationId xmlns:p14="http://schemas.microsoft.com/office/powerpoint/2010/main" val="4289353309"/>
       </p:ext>
     </p:extLst>
   </p:cSld>
@@ -16698,7 +16758,7 @@
                 <a:tabLst/>
                 <a:defRPr/>
               </a:pPr>
-              <a:t>1/19/2023</a:t>
+              <a:t>9/11/2024</a:t>
             </a:fld>
             <a:endParaRPr kumimoji="0" lang="en-US" sz="900" b="0" i="0" u="none" strike="noStrike" kern="1200" cap="none" spc="0" normalizeH="0" baseline="0" noProof="0" dirty="0">
               <a:ln>
@@ -16937,1653 +16997,6 @@
           <p:cNvPr id="2" name="Title 1">
             <a:extLst>
               <a:ext uri="{FF2B5EF4-FFF2-40B4-BE49-F238E27FC236}">
-                <a16:creationId xmlns:a16="http://schemas.microsoft.com/office/drawing/2014/main" id="{4C738398-DAA7-2BCE-76F4-AF36E34176F5}"/>
-              </a:ext>
-            </a:extLst>
-          </p:cNvPr>
-          <p:cNvSpPr>
-            <a:spLocks noGrp="1"/>
-          </p:cNvSpPr>
-          <p:nvPr>
-            <p:ph type="title"/>
-          </p:nvPr>
-        </p:nvSpPr>
-        <p:spPr/>
-        <p:txBody>
-          <a:bodyPr/>
-          <a:lstStyle/>
-          <a:p>
-            <a:r>
-              <a:rPr lang="en-US" sz="3600" dirty="0">
-                <a:solidFill>
-                  <a:schemeClr val="accent1"/>
-                </a:solidFill>
-              </a:rPr>
-              <a:t>Braille Display, with Audio Feedback</a:t>
-            </a:r>
-            <a:endParaRPr lang="en-US" dirty="0"/>
-          </a:p>
-        </p:txBody>
-      </p:sp>
-      <p:sp>
-        <p:nvSpPr>
-          <p:cNvPr id="3" name="Content Placeholder 2">
-            <a:extLst>
-              <a:ext uri="{FF2B5EF4-FFF2-40B4-BE49-F238E27FC236}">
-                <a16:creationId xmlns:a16="http://schemas.microsoft.com/office/drawing/2014/main" id="{0C360948-50A1-2DC8-8408-53BDDAF2B33C}"/>
-              </a:ext>
-            </a:extLst>
-          </p:cNvPr>
-          <p:cNvSpPr>
-            <a:spLocks noGrp="1"/>
-          </p:cNvSpPr>
-          <p:nvPr>
-            <p:ph idx="1"/>
-          </p:nvPr>
-        </p:nvSpPr>
-        <p:spPr>
-          <a:xfrm>
-            <a:off x="550113" y="2051051"/>
-            <a:ext cx="8596668" cy="3880773"/>
-          </a:xfrm>
-        </p:spPr>
-        <p:txBody>
-          <a:bodyPr>
-            <a:normAutofit/>
-          </a:bodyPr>
-          <a:lstStyle/>
-          <a:p>
-            <a:r>
-              <a:rPr lang="en-US" sz="2800" dirty="0">
-                <a:solidFill>
-                  <a:schemeClr val="tx1"/>
-                </a:solidFill>
-              </a:rPr>
-              <a:t>Initially only a diagnostic aid</a:t>
-            </a:r>
-          </a:p>
-          <a:p>
-            <a:r>
-              <a:rPr lang="en-US" sz="2800" dirty="0">
-                <a:solidFill>
-                  <a:schemeClr val="tx1"/>
-                </a:solidFill>
-              </a:rPr>
-              <a:t>Python module tkinter - Canvas, Menu</a:t>
-            </a:r>
-          </a:p>
-          <a:p>
-            <a:r>
-              <a:rPr lang="en-US" sz="2800" dirty="0">
-                <a:solidFill>
-                  <a:schemeClr val="tx1"/>
-                </a:solidFill>
-              </a:rPr>
-              <a:t>Display cells created during drawing phase</a:t>
-            </a:r>
-          </a:p>
-          <a:p>
-            <a:pPr lvl="1"/>
-            <a:r>
-              <a:rPr lang="en-US" sz="2600" dirty="0">
-                <a:solidFill>
-                  <a:schemeClr val="tx1"/>
-                </a:solidFill>
-              </a:rPr>
-              <a:t>Dictionary by (cell-x-index, cell-y-index)</a:t>
-            </a:r>
-          </a:p>
-          <a:p>
-            <a:pPr lvl="1"/>
-            <a:r>
-              <a:rPr lang="en-US" sz="2600" dirty="0">
-                <a:solidFill>
-                  <a:schemeClr val="tx1"/>
-                </a:solidFill>
-              </a:rPr>
-              <a:t>Much energy changing  between coordinates:</a:t>
-            </a:r>
-          </a:p>
-          <a:p>
-            <a:pPr marL="914400" lvl="2" indent="0">
-              <a:buNone/>
-            </a:pPr>
-            <a:r>
-              <a:rPr lang="en-US" sz="2400" dirty="0">
-                <a:solidFill>
-                  <a:schemeClr val="tx1"/>
-                </a:solidFill>
-              </a:rPr>
-              <a:t> canvas – turtle – cell-indices</a:t>
-            </a:r>
-          </a:p>
-        </p:txBody>
-      </p:sp>
-      <p:sp>
-        <p:nvSpPr>
-          <p:cNvPr id="4" name="Date Placeholder 3">
-            <a:extLst>
-              <a:ext uri="{FF2B5EF4-FFF2-40B4-BE49-F238E27FC236}">
-                <a16:creationId xmlns:a16="http://schemas.microsoft.com/office/drawing/2014/main" id="{5EDCC79F-3336-222D-207D-DDBE9A586431}"/>
-              </a:ext>
-            </a:extLst>
-          </p:cNvPr>
-          <p:cNvSpPr>
-            <a:spLocks noGrp="1"/>
-          </p:cNvSpPr>
-          <p:nvPr>
-            <p:ph type="dt" sz="half" idx="10"/>
-          </p:nvPr>
-        </p:nvSpPr>
-        <p:spPr/>
-        <p:txBody>
-          <a:bodyPr/>
-          <a:lstStyle/>
-          <a:p>
-            <a:fld id="{A7119916-CD40-456D-ABE3-55F8822671F7}" type="datetime1">
-              <a:rPr lang="en-US" smtClean="0"/>
-              <a:t>1/19/2023</a:t>
-            </a:fld>
-            <a:endParaRPr lang="en-US" dirty="0"/>
-          </a:p>
-        </p:txBody>
-      </p:sp>
-      <p:sp>
-        <p:nvSpPr>
-          <p:cNvPr id="5" name="Footer Placeholder 4">
-            <a:extLst>
-              <a:ext uri="{FF2B5EF4-FFF2-40B4-BE49-F238E27FC236}">
-                <a16:creationId xmlns:a16="http://schemas.microsoft.com/office/drawing/2014/main" id="{009CCD2F-A4CE-60DA-E7BA-37B3D06C1ADD}"/>
-              </a:ext>
-            </a:extLst>
-          </p:cNvPr>
-          <p:cNvSpPr>
-            <a:spLocks noGrp="1"/>
-          </p:cNvSpPr>
-          <p:nvPr>
-            <p:ph type="ftr" sz="quarter" idx="11"/>
-          </p:nvPr>
-        </p:nvSpPr>
-        <p:spPr/>
-        <p:txBody>
-          <a:bodyPr/>
-          <a:lstStyle/>
-          <a:p>
-            <a:r>
-              <a:rPr lang="en-US"/>
-              <a:t>raysmith@alum.mit.edu</a:t>
-            </a:r>
-            <a:endParaRPr lang="en-US" dirty="0"/>
-          </a:p>
-        </p:txBody>
-      </p:sp>
-      <p:sp>
-        <p:nvSpPr>
-          <p:cNvPr id="6" name="Slide Number Placeholder 5">
-            <a:extLst>
-              <a:ext uri="{FF2B5EF4-FFF2-40B4-BE49-F238E27FC236}">
-                <a16:creationId xmlns:a16="http://schemas.microsoft.com/office/drawing/2014/main" id="{54E7395C-C96B-C82A-58E2-49E4B31B73C9}"/>
-              </a:ext>
-            </a:extLst>
-          </p:cNvPr>
-          <p:cNvSpPr>
-            <a:spLocks noGrp="1"/>
-          </p:cNvSpPr>
-          <p:nvPr>
-            <p:ph type="sldNum" sz="quarter" idx="12"/>
-          </p:nvPr>
-        </p:nvSpPr>
-        <p:spPr/>
-        <p:txBody>
-          <a:bodyPr/>
-          <a:lstStyle/>
-          <a:p>
-            <a:fld id="{6D22F896-40B5-4ADD-8801-0D06FADFA095}" type="slidenum">
-              <a:rPr lang="en-US" smtClean="0"/>
-              <a:t>30</a:t>
-            </a:fld>
-            <a:endParaRPr lang="en-US" dirty="0"/>
-          </a:p>
-        </p:txBody>
-      </p:sp>
-      <p:pic>
-        <p:nvPicPr>
-          <p:cNvPr id="1025" name="Picture 1" descr="2">
-            <a:extLst>
-              <a:ext uri="{FF2B5EF4-FFF2-40B4-BE49-F238E27FC236}">
-                <a16:creationId xmlns:a16="http://schemas.microsoft.com/office/drawing/2014/main" id="{E655AFAE-90EF-81F0-845D-A0C543B6A4BD}"/>
-              </a:ext>
-            </a:extLst>
-          </p:cNvPr>
-          <p:cNvPicPr>
-            <a:picLocks noChangeAspect="1" noChangeArrowheads="1"/>
-          </p:cNvPicPr>
-          <p:nvPr/>
-        </p:nvPicPr>
-        <p:blipFill>
-          <a:blip r:embed="rId2">
-            <a:extLst>
-              <a:ext uri="{28A0092B-C50C-407E-A947-70E740481C1C}">
-                <a14:useLocalDpi xmlns:a14="http://schemas.microsoft.com/office/drawing/2010/main" val="0"/>
-              </a:ext>
-            </a:extLst>
-          </a:blip>
-          <a:srcRect/>
-          <a:stretch>
-            <a:fillRect/>
-          </a:stretch>
-        </p:blipFill>
-        <p:spPr bwMode="auto">
-          <a:xfrm>
-            <a:off x="0" y="0"/>
-            <a:ext cx="133350" cy="219075"/>
-          </a:xfrm>
-          <a:prstGeom prst="rect">
-            <a:avLst/>
-          </a:prstGeom>
-          <a:noFill/>
-          <a:extLst>
-            <a:ext uri="{909E8E84-426E-40DD-AFC4-6F175D3DCCD1}">
-              <a14:hiddenFill xmlns:a14="http://schemas.microsoft.com/office/drawing/2010/main">
-                <a:solidFill>
-                  <a:srgbClr val="FFFFFF"/>
-                </a:solidFill>
-              </a14:hiddenFill>
-            </a:ext>
-          </a:extLst>
-        </p:spPr>
-      </p:pic>
-    </p:spTree>
-    <p:extLst>
-      <p:ext uri="{BB962C8B-B14F-4D97-AF65-F5344CB8AC3E}">
-        <p14:creationId xmlns:p14="http://schemas.microsoft.com/office/powerpoint/2010/main" val="4035209992"/>
-      </p:ext>
-    </p:extLst>
-  </p:cSld>
-  <p:clrMapOvr>
-    <a:masterClrMapping/>
-  </p:clrMapOvr>
-</p:sld>
-</file>
-
-<file path=ppt/slides/slide31.xml><?xml version="1.0" encoding="utf-8"?>
-<p:sld xmlns:a="http://schemas.openxmlformats.org/drawingml/2006/main" xmlns:r="http://schemas.openxmlformats.org/officeDocument/2006/relationships" xmlns:p="http://schemas.openxmlformats.org/presentationml/2006/main">
-  <p:cSld>
-    <p:bg>
-      <p:bgPr>
-        <a:gradFill>
-          <a:gsLst>
-            <a:gs pos="0">
-              <a:schemeClr val="accent4">
-                <a:lumMod val="20000"/>
-                <a:lumOff val="80000"/>
-              </a:schemeClr>
-            </a:gs>
-            <a:gs pos="74000">
-              <a:schemeClr val="accent4">
-                <a:lumMod val="45000"/>
-                <a:lumOff val="55000"/>
-              </a:schemeClr>
-            </a:gs>
-            <a:gs pos="83000">
-              <a:schemeClr val="accent4">
-                <a:lumMod val="45000"/>
-                <a:lumOff val="55000"/>
-              </a:schemeClr>
-            </a:gs>
-            <a:gs pos="100000">
-              <a:schemeClr val="accent4">
-                <a:lumMod val="30000"/>
-                <a:lumOff val="70000"/>
-              </a:schemeClr>
-            </a:gs>
-          </a:gsLst>
-          <a:lin ang="5400000" scaled="1"/>
-        </a:gradFill>
-        <a:effectLst/>
-      </p:bgPr>
-    </p:bg>
-    <p:spTree>
-      <p:nvGrpSpPr>
-        <p:cNvPr id="1" name=""/>
-        <p:cNvGrpSpPr/>
-        <p:nvPr/>
-      </p:nvGrpSpPr>
-      <p:grpSpPr>
-        <a:xfrm>
-          <a:off x="0" y="0"/>
-          <a:ext cx="0" cy="0"/>
-          <a:chOff x="0" y="0"/>
-          <a:chExt cx="0" cy="0"/>
-        </a:xfrm>
-      </p:grpSpPr>
-      <p:sp>
-        <p:nvSpPr>
-          <p:cNvPr id="2" name="Title 1">
-            <a:extLst>
-              <a:ext uri="{FF2B5EF4-FFF2-40B4-BE49-F238E27FC236}">
-                <a16:creationId xmlns:a16="http://schemas.microsoft.com/office/drawing/2014/main" id="{4C738398-DAA7-2BCE-76F4-AF36E34176F5}"/>
-              </a:ext>
-            </a:extLst>
-          </p:cNvPr>
-          <p:cNvSpPr>
-            <a:spLocks noGrp="1"/>
-          </p:cNvSpPr>
-          <p:nvPr>
-            <p:ph type="title"/>
-          </p:nvPr>
-        </p:nvSpPr>
-        <p:spPr/>
-        <p:txBody>
-          <a:bodyPr>
-            <a:normAutofit/>
-          </a:bodyPr>
-          <a:lstStyle/>
-          <a:p>
-            <a:pPr algn="ctr"/>
-            <a:r>
-              <a:rPr lang="en-US" sz="3600" dirty="0">
-                <a:solidFill>
-                  <a:schemeClr val="accent1"/>
-                </a:solidFill>
-              </a:rPr>
-              <a:t>Alternate Strategy for Display Cells</a:t>
-            </a:r>
-            <a:br>
-              <a:rPr lang="en-US" sz="3600" dirty="0">
-                <a:solidFill>
-                  <a:schemeClr val="accent1"/>
-                </a:solidFill>
-              </a:rPr>
-            </a:br>
-            <a:r>
-              <a:rPr lang="en-US" sz="3600" dirty="0">
-                <a:solidFill>
-                  <a:schemeClr val="accent1"/>
-                </a:solidFill>
-              </a:rPr>
-              <a:t>Road Not Taken</a:t>
-            </a:r>
-            <a:endParaRPr lang="en-US" dirty="0"/>
-          </a:p>
-        </p:txBody>
-      </p:sp>
-      <p:sp>
-        <p:nvSpPr>
-          <p:cNvPr id="3" name="Content Placeholder 2">
-            <a:extLst>
-              <a:ext uri="{FF2B5EF4-FFF2-40B4-BE49-F238E27FC236}">
-                <a16:creationId xmlns:a16="http://schemas.microsoft.com/office/drawing/2014/main" id="{0C360948-50A1-2DC8-8408-53BDDAF2B33C}"/>
-              </a:ext>
-            </a:extLst>
-          </p:cNvPr>
-          <p:cNvSpPr>
-            <a:spLocks noGrp="1"/>
-          </p:cNvSpPr>
-          <p:nvPr>
-            <p:ph idx="1"/>
-          </p:nvPr>
-        </p:nvSpPr>
-        <p:spPr>
-          <a:xfrm>
-            <a:off x="550113" y="2051051"/>
-            <a:ext cx="8596668" cy="3880773"/>
-          </a:xfrm>
-        </p:spPr>
-        <p:txBody>
-          <a:bodyPr>
-            <a:normAutofit lnSpcReduction="10000"/>
-          </a:bodyPr>
-          <a:lstStyle/>
-          <a:p>
-            <a:r>
-              <a:rPr lang="en-US" sz="3200" dirty="0">
-                <a:solidFill>
-                  <a:schemeClr val="tx1"/>
-                </a:solidFill>
-              </a:rPr>
-              <a:t>Let most Turtle calls go through unchanged</a:t>
-            </a:r>
-          </a:p>
-          <a:p>
-            <a:r>
-              <a:rPr lang="en-US" sz="3200" dirty="0">
-                <a:solidFill>
-                  <a:schemeClr val="tx1"/>
-                </a:solidFill>
-              </a:rPr>
-              <a:t>Scan created Tkinter Canvas</a:t>
-            </a:r>
-          </a:p>
-          <a:p>
-            <a:r>
-              <a:rPr lang="en-US" sz="3200" dirty="0">
-                <a:solidFill>
-                  <a:schemeClr val="tx1"/>
-                </a:solidFill>
-              </a:rPr>
-              <a:t>Divide up canvas into display regions (40x25)</a:t>
-            </a:r>
-          </a:p>
-          <a:p>
-            <a:r>
-              <a:rPr lang="en-US" sz="3200" dirty="0">
-                <a:solidFill>
-                  <a:schemeClr val="tx1"/>
-                </a:solidFill>
-              </a:rPr>
-              <a:t>For each region find overlapping Canvas items</a:t>
-            </a:r>
-          </a:p>
-          <a:p>
-            <a:r>
-              <a:rPr lang="en-US" sz="3200" dirty="0">
-                <a:solidFill>
-                  <a:schemeClr val="tx1"/>
-                </a:solidFill>
-              </a:rPr>
-              <a:t>Where found – create a display cell</a:t>
-            </a:r>
-          </a:p>
-          <a:p>
-            <a:endParaRPr lang="en-US" sz="2400" dirty="0">
-              <a:solidFill>
-                <a:schemeClr val="accent1"/>
-              </a:solidFill>
-            </a:endParaRPr>
-          </a:p>
-        </p:txBody>
-      </p:sp>
-      <p:sp>
-        <p:nvSpPr>
-          <p:cNvPr id="4" name="Date Placeholder 3">
-            <a:extLst>
-              <a:ext uri="{FF2B5EF4-FFF2-40B4-BE49-F238E27FC236}">
-                <a16:creationId xmlns:a16="http://schemas.microsoft.com/office/drawing/2014/main" id="{5EDCC79F-3336-222D-207D-DDBE9A586431}"/>
-              </a:ext>
-            </a:extLst>
-          </p:cNvPr>
-          <p:cNvSpPr>
-            <a:spLocks noGrp="1"/>
-          </p:cNvSpPr>
-          <p:nvPr>
-            <p:ph type="dt" sz="half" idx="10"/>
-          </p:nvPr>
-        </p:nvSpPr>
-        <p:spPr/>
-        <p:txBody>
-          <a:bodyPr/>
-          <a:lstStyle/>
-          <a:p>
-            <a:fld id="{A7119916-CD40-456D-ABE3-55F8822671F7}" type="datetime1">
-              <a:rPr lang="en-US" smtClean="0"/>
-              <a:t>1/19/2023</a:t>
-            </a:fld>
-            <a:endParaRPr lang="en-US" dirty="0"/>
-          </a:p>
-        </p:txBody>
-      </p:sp>
-      <p:sp>
-        <p:nvSpPr>
-          <p:cNvPr id="5" name="Footer Placeholder 4">
-            <a:extLst>
-              <a:ext uri="{FF2B5EF4-FFF2-40B4-BE49-F238E27FC236}">
-                <a16:creationId xmlns:a16="http://schemas.microsoft.com/office/drawing/2014/main" id="{009CCD2F-A4CE-60DA-E7BA-37B3D06C1ADD}"/>
-              </a:ext>
-            </a:extLst>
-          </p:cNvPr>
-          <p:cNvSpPr>
-            <a:spLocks noGrp="1"/>
-          </p:cNvSpPr>
-          <p:nvPr>
-            <p:ph type="ftr" sz="quarter" idx="11"/>
-          </p:nvPr>
-        </p:nvSpPr>
-        <p:spPr/>
-        <p:txBody>
-          <a:bodyPr/>
-          <a:lstStyle/>
-          <a:p>
-            <a:r>
-              <a:rPr lang="en-US"/>
-              <a:t>raysmith@alum.mit.edu</a:t>
-            </a:r>
-            <a:endParaRPr lang="en-US" dirty="0"/>
-          </a:p>
-        </p:txBody>
-      </p:sp>
-      <p:sp>
-        <p:nvSpPr>
-          <p:cNvPr id="6" name="Slide Number Placeholder 5">
-            <a:extLst>
-              <a:ext uri="{FF2B5EF4-FFF2-40B4-BE49-F238E27FC236}">
-                <a16:creationId xmlns:a16="http://schemas.microsoft.com/office/drawing/2014/main" id="{54E7395C-C96B-C82A-58E2-49E4B31B73C9}"/>
-              </a:ext>
-            </a:extLst>
-          </p:cNvPr>
-          <p:cNvSpPr>
-            <a:spLocks noGrp="1"/>
-          </p:cNvSpPr>
-          <p:nvPr>
-            <p:ph type="sldNum" sz="quarter" idx="12"/>
-          </p:nvPr>
-        </p:nvSpPr>
-        <p:spPr/>
-        <p:txBody>
-          <a:bodyPr/>
-          <a:lstStyle/>
-          <a:p>
-            <a:fld id="{6D22F896-40B5-4ADD-8801-0D06FADFA095}" type="slidenum">
-              <a:rPr lang="en-US" smtClean="0"/>
-              <a:t>31</a:t>
-            </a:fld>
-            <a:endParaRPr lang="en-US" dirty="0"/>
-          </a:p>
-        </p:txBody>
-      </p:sp>
-      <p:pic>
-        <p:nvPicPr>
-          <p:cNvPr id="1025" name="Picture 1" descr="2">
-            <a:extLst>
-              <a:ext uri="{FF2B5EF4-FFF2-40B4-BE49-F238E27FC236}">
-                <a16:creationId xmlns:a16="http://schemas.microsoft.com/office/drawing/2014/main" id="{E655AFAE-90EF-81F0-845D-A0C543B6A4BD}"/>
-              </a:ext>
-            </a:extLst>
-          </p:cNvPr>
-          <p:cNvPicPr>
-            <a:picLocks noChangeAspect="1" noChangeArrowheads="1"/>
-          </p:cNvPicPr>
-          <p:nvPr/>
-        </p:nvPicPr>
-        <p:blipFill>
-          <a:blip r:embed="rId2">
-            <a:extLst>
-              <a:ext uri="{28A0092B-C50C-407E-A947-70E740481C1C}">
-                <a14:useLocalDpi xmlns:a14="http://schemas.microsoft.com/office/drawing/2010/main" val="0"/>
-              </a:ext>
-            </a:extLst>
-          </a:blip>
-          <a:srcRect/>
-          <a:stretch>
-            <a:fillRect/>
-          </a:stretch>
-        </p:blipFill>
-        <p:spPr bwMode="auto">
-          <a:xfrm>
-            <a:off x="0" y="0"/>
-            <a:ext cx="133350" cy="219075"/>
-          </a:xfrm>
-          <a:prstGeom prst="rect">
-            <a:avLst/>
-          </a:prstGeom>
-          <a:noFill/>
-          <a:extLst>
-            <a:ext uri="{909E8E84-426E-40DD-AFC4-6F175D3DCCD1}">
-              <a14:hiddenFill xmlns:a14="http://schemas.microsoft.com/office/drawing/2010/main">
-                <a:solidFill>
-                  <a:srgbClr val="FFFFFF"/>
-                </a:solidFill>
-              </a14:hiddenFill>
-            </a:ext>
-          </a:extLst>
-        </p:spPr>
-      </p:pic>
-    </p:spTree>
-    <p:extLst>
-      <p:ext uri="{BB962C8B-B14F-4D97-AF65-F5344CB8AC3E}">
-        <p14:creationId xmlns:p14="http://schemas.microsoft.com/office/powerpoint/2010/main" val="496217816"/>
-      </p:ext>
-    </p:extLst>
-  </p:cSld>
-  <p:clrMapOvr>
-    <a:masterClrMapping/>
-  </p:clrMapOvr>
-</p:sld>
-</file>
-
-<file path=ppt/slides/slide32.xml><?xml version="1.0" encoding="utf-8"?>
-<p:sld xmlns:a="http://schemas.openxmlformats.org/drawingml/2006/main" xmlns:r="http://schemas.openxmlformats.org/officeDocument/2006/relationships" xmlns:p="http://schemas.openxmlformats.org/presentationml/2006/main">
-  <p:cSld>
-    <p:bg>
-      <p:bgPr>
-        <a:gradFill>
-          <a:gsLst>
-            <a:gs pos="0">
-              <a:schemeClr val="accent4">
-                <a:lumMod val="20000"/>
-                <a:lumOff val="80000"/>
-              </a:schemeClr>
-            </a:gs>
-            <a:gs pos="74000">
-              <a:schemeClr val="accent4">
-                <a:lumMod val="45000"/>
-                <a:lumOff val="55000"/>
-              </a:schemeClr>
-            </a:gs>
-            <a:gs pos="83000">
-              <a:schemeClr val="accent4">
-                <a:lumMod val="45000"/>
-                <a:lumOff val="55000"/>
-              </a:schemeClr>
-            </a:gs>
-            <a:gs pos="100000">
-              <a:schemeClr val="accent4">
-                <a:lumMod val="30000"/>
-                <a:lumOff val="70000"/>
-              </a:schemeClr>
-            </a:gs>
-          </a:gsLst>
-          <a:lin ang="5400000" scaled="1"/>
-        </a:gradFill>
-        <a:effectLst/>
-      </p:bgPr>
-    </p:bg>
-    <p:spTree>
-      <p:nvGrpSpPr>
-        <p:cNvPr id="1" name=""/>
-        <p:cNvGrpSpPr/>
-        <p:nvPr/>
-      </p:nvGrpSpPr>
-      <p:grpSpPr>
-        <a:xfrm>
-          <a:off x="0" y="0"/>
-          <a:ext cx="0" cy="0"/>
-          <a:chOff x="0" y="0"/>
-          <a:chExt cx="0" cy="0"/>
-        </a:xfrm>
-      </p:grpSpPr>
-      <p:sp>
-        <p:nvSpPr>
-          <p:cNvPr id="2" name="Title 1">
-            <a:extLst>
-              <a:ext uri="{FF2B5EF4-FFF2-40B4-BE49-F238E27FC236}">
-                <a16:creationId xmlns:a16="http://schemas.microsoft.com/office/drawing/2014/main" id="{4C738398-DAA7-2BCE-76F4-AF36E34176F5}"/>
-              </a:ext>
-            </a:extLst>
-          </p:cNvPr>
-          <p:cNvSpPr>
-            <a:spLocks noGrp="1"/>
-          </p:cNvSpPr>
-          <p:nvPr>
-            <p:ph type="title"/>
-          </p:nvPr>
-        </p:nvSpPr>
-        <p:spPr/>
-        <p:txBody>
-          <a:bodyPr/>
-          <a:lstStyle/>
-          <a:p>
-            <a:r>
-              <a:rPr lang="en-US" sz="3600" dirty="0">
-                <a:solidFill>
-                  <a:schemeClr val="accent1"/>
-                </a:solidFill>
-              </a:rPr>
-              <a:t>Alternate Strategy continued</a:t>
-            </a:r>
-            <a:endParaRPr lang="en-US" dirty="0"/>
-          </a:p>
-        </p:txBody>
-      </p:sp>
-      <p:sp>
-        <p:nvSpPr>
-          <p:cNvPr id="3" name="Content Placeholder 2">
-            <a:extLst>
-              <a:ext uri="{FF2B5EF4-FFF2-40B4-BE49-F238E27FC236}">
-                <a16:creationId xmlns:a16="http://schemas.microsoft.com/office/drawing/2014/main" id="{0C360948-50A1-2DC8-8408-53BDDAF2B33C}"/>
-              </a:ext>
-            </a:extLst>
-          </p:cNvPr>
-          <p:cNvSpPr>
-            <a:spLocks noGrp="1"/>
-          </p:cNvSpPr>
-          <p:nvPr>
-            <p:ph idx="1"/>
-          </p:nvPr>
-        </p:nvSpPr>
-        <p:spPr>
-          <a:xfrm>
-            <a:off x="550113" y="2051051"/>
-            <a:ext cx="8596668" cy="3880773"/>
-          </a:xfrm>
-        </p:spPr>
-        <p:txBody>
-          <a:bodyPr>
-            <a:noAutofit/>
-          </a:bodyPr>
-          <a:lstStyle/>
-          <a:p>
-            <a:r>
-              <a:rPr lang="en-US" sz="3600" dirty="0">
-                <a:solidFill>
-                  <a:schemeClr val="tx1"/>
-                </a:solidFill>
-              </a:rPr>
-              <a:t>Benefits:</a:t>
-            </a:r>
-          </a:p>
-          <a:p>
-            <a:pPr lvl="1"/>
-            <a:r>
-              <a:rPr lang="en-US" sz="3600" dirty="0">
-                <a:solidFill>
-                  <a:schemeClr val="tx1"/>
-                </a:solidFill>
-              </a:rPr>
-              <a:t>Simpler</a:t>
-            </a:r>
-          </a:p>
-          <a:p>
-            <a:pPr lvl="1"/>
-            <a:r>
-              <a:rPr lang="en-US" sz="3600" dirty="0">
-                <a:solidFill>
-                  <a:schemeClr val="tx1"/>
-                </a:solidFill>
-              </a:rPr>
-              <a:t>Applicable to non-turtle tkinter programs</a:t>
-            </a:r>
-          </a:p>
-          <a:p>
-            <a:pPr lvl="1"/>
-            <a:r>
-              <a:rPr lang="en-US" sz="3600" dirty="0">
-                <a:solidFill>
-                  <a:schemeClr val="tx1"/>
-                </a:solidFill>
-              </a:rPr>
-              <a:t>Facilitates scale changes</a:t>
-            </a:r>
-          </a:p>
-          <a:p>
-            <a:r>
-              <a:rPr lang="en-US" sz="3600" dirty="0">
-                <a:solidFill>
-                  <a:schemeClr val="tx1"/>
-                </a:solidFill>
-              </a:rPr>
-              <a:t>We tried, but ran in to problems</a:t>
-            </a:r>
-          </a:p>
-        </p:txBody>
-      </p:sp>
-      <p:sp>
-        <p:nvSpPr>
-          <p:cNvPr id="4" name="Date Placeholder 3">
-            <a:extLst>
-              <a:ext uri="{FF2B5EF4-FFF2-40B4-BE49-F238E27FC236}">
-                <a16:creationId xmlns:a16="http://schemas.microsoft.com/office/drawing/2014/main" id="{5EDCC79F-3336-222D-207D-DDBE9A586431}"/>
-              </a:ext>
-            </a:extLst>
-          </p:cNvPr>
-          <p:cNvSpPr>
-            <a:spLocks noGrp="1"/>
-          </p:cNvSpPr>
-          <p:nvPr>
-            <p:ph type="dt" sz="half" idx="10"/>
-          </p:nvPr>
-        </p:nvSpPr>
-        <p:spPr/>
-        <p:txBody>
-          <a:bodyPr/>
-          <a:lstStyle/>
-          <a:p>
-            <a:fld id="{A7119916-CD40-456D-ABE3-55F8822671F7}" type="datetime1">
-              <a:rPr lang="en-US" smtClean="0"/>
-              <a:t>1/19/2023</a:t>
-            </a:fld>
-            <a:endParaRPr lang="en-US" dirty="0"/>
-          </a:p>
-        </p:txBody>
-      </p:sp>
-      <p:sp>
-        <p:nvSpPr>
-          <p:cNvPr id="5" name="Footer Placeholder 4">
-            <a:extLst>
-              <a:ext uri="{FF2B5EF4-FFF2-40B4-BE49-F238E27FC236}">
-                <a16:creationId xmlns:a16="http://schemas.microsoft.com/office/drawing/2014/main" id="{009CCD2F-A4CE-60DA-E7BA-37B3D06C1ADD}"/>
-              </a:ext>
-            </a:extLst>
-          </p:cNvPr>
-          <p:cNvSpPr>
-            <a:spLocks noGrp="1"/>
-          </p:cNvSpPr>
-          <p:nvPr>
-            <p:ph type="ftr" sz="quarter" idx="11"/>
-          </p:nvPr>
-        </p:nvSpPr>
-        <p:spPr/>
-        <p:txBody>
-          <a:bodyPr/>
-          <a:lstStyle/>
-          <a:p>
-            <a:r>
-              <a:rPr lang="en-US"/>
-              <a:t>raysmith@alum.mit.edu</a:t>
-            </a:r>
-            <a:endParaRPr lang="en-US" dirty="0"/>
-          </a:p>
-        </p:txBody>
-      </p:sp>
-      <p:sp>
-        <p:nvSpPr>
-          <p:cNvPr id="6" name="Slide Number Placeholder 5">
-            <a:extLst>
-              <a:ext uri="{FF2B5EF4-FFF2-40B4-BE49-F238E27FC236}">
-                <a16:creationId xmlns:a16="http://schemas.microsoft.com/office/drawing/2014/main" id="{54E7395C-C96B-C82A-58E2-49E4B31B73C9}"/>
-              </a:ext>
-            </a:extLst>
-          </p:cNvPr>
-          <p:cNvSpPr>
-            <a:spLocks noGrp="1"/>
-          </p:cNvSpPr>
-          <p:nvPr>
-            <p:ph type="sldNum" sz="quarter" idx="12"/>
-          </p:nvPr>
-        </p:nvSpPr>
-        <p:spPr/>
-        <p:txBody>
-          <a:bodyPr/>
-          <a:lstStyle/>
-          <a:p>
-            <a:fld id="{6D22F896-40B5-4ADD-8801-0D06FADFA095}" type="slidenum">
-              <a:rPr lang="en-US" smtClean="0"/>
-              <a:t>32</a:t>
-            </a:fld>
-            <a:endParaRPr lang="en-US" dirty="0"/>
-          </a:p>
-        </p:txBody>
-      </p:sp>
-      <p:pic>
-        <p:nvPicPr>
-          <p:cNvPr id="1025" name="Picture 1" descr="2">
-            <a:extLst>
-              <a:ext uri="{FF2B5EF4-FFF2-40B4-BE49-F238E27FC236}">
-                <a16:creationId xmlns:a16="http://schemas.microsoft.com/office/drawing/2014/main" id="{E655AFAE-90EF-81F0-845D-A0C543B6A4BD}"/>
-              </a:ext>
-            </a:extLst>
-          </p:cNvPr>
-          <p:cNvPicPr>
-            <a:picLocks noChangeAspect="1" noChangeArrowheads="1"/>
-          </p:cNvPicPr>
-          <p:nvPr/>
-        </p:nvPicPr>
-        <p:blipFill>
-          <a:blip r:embed="rId2">
-            <a:extLst>
-              <a:ext uri="{28A0092B-C50C-407E-A947-70E740481C1C}">
-                <a14:useLocalDpi xmlns:a14="http://schemas.microsoft.com/office/drawing/2010/main" val="0"/>
-              </a:ext>
-            </a:extLst>
-          </a:blip>
-          <a:srcRect/>
-          <a:stretch>
-            <a:fillRect/>
-          </a:stretch>
-        </p:blipFill>
-        <p:spPr bwMode="auto">
-          <a:xfrm>
-            <a:off x="0" y="0"/>
-            <a:ext cx="133350" cy="219075"/>
-          </a:xfrm>
-          <a:prstGeom prst="rect">
-            <a:avLst/>
-          </a:prstGeom>
-          <a:noFill/>
-          <a:extLst>
-            <a:ext uri="{909E8E84-426E-40DD-AFC4-6F175D3DCCD1}">
-              <a14:hiddenFill xmlns:a14="http://schemas.microsoft.com/office/drawing/2010/main">
-                <a:solidFill>
-                  <a:srgbClr val="FFFFFF"/>
-                </a:solidFill>
-              </a14:hiddenFill>
-            </a:ext>
-          </a:extLst>
-        </p:spPr>
-      </p:pic>
-    </p:spTree>
-    <p:extLst>
-      <p:ext uri="{BB962C8B-B14F-4D97-AF65-F5344CB8AC3E}">
-        <p14:creationId xmlns:p14="http://schemas.microsoft.com/office/powerpoint/2010/main" val="4097782202"/>
-      </p:ext>
-    </p:extLst>
-  </p:cSld>
-  <p:clrMapOvr>
-    <a:masterClrMapping/>
-  </p:clrMapOvr>
-</p:sld>
-</file>
-
-<file path=ppt/slides/slide33.xml><?xml version="1.0" encoding="utf-8"?>
-<p:sld xmlns:a="http://schemas.openxmlformats.org/drawingml/2006/main" xmlns:r="http://schemas.openxmlformats.org/officeDocument/2006/relationships" xmlns:p="http://schemas.openxmlformats.org/presentationml/2006/main">
-  <p:cSld>
-    <p:bg>
-      <p:bgPr>
-        <a:gradFill>
-          <a:gsLst>
-            <a:gs pos="0">
-              <a:schemeClr val="accent4">
-                <a:lumMod val="20000"/>
-                <a:lumOff val="80000"/>
-              </a:schemeClr>
-            </a:gs>
-            <a:gs pos="74000">
-              <a:schemeClr val="accent4">
-                <a:lumMod val="45000"/>
-                <a:lumOff val="55000"/>
-              </a:schemeClr>
-            </a:gs>
-            <a:gs pos="83000">
-              <a:schemeClr val="accent4">
-                <a:lumMod val="45000"/>
-                <a:lumOff val="55000"/>
-              </a:schemeClr>
-            </a:gs>
-            <a:gs pos="100000">
-              <a:schemeClr val="accent4">
-                <a:lumMod val="30000"/>
-                <a:lumOff val="70000"/>
-              </a:schemeClr>
-            </a:gs>
-          </a:gsLst>
-          <a:lin ang="5400000" scaled="1"/>
-        </a:gradFill>
-        <a:effectLst/>
-      </p:bgPr>
-    </p:bg>
-    <p:spTree>
-      <p:nvGrpSpPr>
-        <p:cNvPr id="1" name=""/>
-        <p:cNvGrpSpPr/>
-        <p:nvPr/>
-      </p:nvGrpSpPr>
-      <p:grpSpPr>
-        <a:xfrm>
-          <a:off x="0" y="0"/>
-          <a:ext cx="0" cy="0"/>
-          <a:chOff x="0" y="0"/>
-          <a:chExt cx="0" cy="0"/>
-        </a:xfrm>
-      </p:grpSpPr>
-      <p:sp>
-        <p:nvSpPr>
-          <p:cNvPr id="2" name="Title 1">
-            <a:extLst>
-              <a:ext uri="{FF2B5EF4-FFF2-40B4-BE49-F238E27FC236}">
-                <a16:creationId xmlns:a16="http://schemas.microsoft.com/office/drawing/2014/main" id="{4C738398-DAA7-2BCE-76F4-AF36E34176F5}"/>
-              </a:ext>
-            </a:extLst>
-          </p:cNvPr>
-          <p:cNvSpPr>
-            <a:spLocks noGrp="1"/>
-          </p:cNvSpPr>
-          <p:nvPr>
-            <p:ph type="title"/>
-          </p:nvPr>
-        </p:nvSpPr>
-        <p:spPr/>
-        <p:txBody>
-          <a:bodyPr/>
-          <a:lstStyle/>
-          <a:p>
-            <a:r>
-              <a:rPr lang="en-US" sz="3600" dirty="0">
-                <a:solidFill>
-                  <a:schemeClr val="accent1"/>
-                </a:solidFill>
-              </a:rPr>
-              <a:t>Future Possibilities</a:t>
-            </a:r>
-            <a:endParaRPr lang="en-US" dirty="0"/>
-          </a:p>
-        </p:txBody>
-      </p:sp>
-      <p:sp>
-        <p:nvSpPr>
-          <p:cNvPr id="3" name="Content Placeholder 2">
-            <a:extLst>
-              <a:ext uri="{FF2B5EF4-FFF2-40B4-BE49-F238E27FC236}">
-                <a16:creationId xmlns:a16="http://schemas.microsoft.com/office/drawing/2014/main" id="{0C360948-50A1-2DC8-8408-53BDDAF2B33C}"/>
-              </a:ext>
-            </a:extLst>
-          </p:cNvPr>
-          <p:cNvSpPr>
-            <a:spLocks noGrp="1"/>
-          </p:cNvSpPr>
-          <p:nvPr>
-            <p:ph idx="1"/>
-          </p:nvPr>
-        </p:nvSpPr>
-        <p:spPr>
-          <a:xfrm>
-            <a:off x="550113" y="2051051"/>
-            <a:ext cx="8596668" cy="3880773"/>
-          </a:xfrm>
-        </p:spPr>
-        <p:txBody>
-          <a:bodyPr>
-            <a:noAutofit/>
-          </a:bodyPr>
-          <a:lstStyle/>
-          <a:p>
-            <a:r>
-              <a:rPr lang="en-US" sz="3600" dirty="0">
-                <a:solidFill>
-                  <a:schemeClr val="tx1"/>
-                </a:solidFill>
-              </a:rPr>
-              <a:t>Implement some of the Tool Possibilities</a:t>
-            </a:r>
-          </a:p>
-          <a:p>
-            <a:r>
-              <a:rPr lang="en-US" sz="3600" dirty="0">
-                <a:solidFill>
-                  <a:schemeClr val="tx1"/>
-                </a:solidFill>
-              </a:rPr>
-              <a:t>Retry the Canvas scanning approach</a:t>
-            </a:r>
-          </a:p>
-          <a:p>
-            <a:endParaRPr lang="en-US" sz="3600" dirty="0">
-              <a:solidFill>
-                <a:schemeClr val="tx1"/>
-              </a:solidFill>
-            </a:endParaRPr>
-          </a:p>
-        </p:txBody>
-      </p:sp>
-      <p:sp>
-        <p:nvSpPr>
-          <p:cNvPr id="4" name="Date Placeholder 3">
-            <a:extLst>
-              <a:ext uri="{FF2B5EF4-FFF2-40B4-BE49-F238E27FC236}">
-                <a16:creationId xmlns:a16="http://schemas.microsoft.com/office/drawing/2014/main" id="{5EDCC79F-3336-222D-207D-DDBE9A586431}"/>
-              </a:ext>
-            </a:extLst>
-          </p:cNvPr>
-          <p:cNvSpPr>
-            <a:spLocks noGrp="1"/>
-          </p:cNvSpPr>
-          <p:nvPr>
-            <p:ph type="dt" sz="half" idx="10"/>
-          </p:nvPr>
-        </p:nvSpPr>
-        <p:spPr/>
-        <p:txBody>
-          <a:bodyPr/>
-          <a:lstStyle/>
-          <a:p>
-            <a:fld id="{A7119916-CD40-456D-ABE3-55F8822671F7}" type="datetime1">
-              <a:rPr lang="en-US" smtClean="0"/>
-              <a:t>1/19/2023</a:t>
-            </a:fld>
-            <a:endParaRPr lang="en-US" dirty="0"/>
-          </a:p>
-        </p:txBody>
-      </p:sp>
-      <p:sp>
-        <p:nvSpPr>
-          <p:cNvPr id="5" name="Footer Placeholder 4">
-            <a:extLst>
-              <a:ext uri="{FF2B5EF4-FFF2-40B4-BE49-F238E27FC236}">
-                <a16:creationId xmlns:a16="http://schemas.microsoft.com/office/drawing/2014/main" id="{009CCD2F-A4CE-60DA-E7BA-37B3D06C1ADD}"/>
-              </a:ext>
-            </a:extLst>
-          </p:cNvPr>
-          <p:cNvSpPr>
-            <a:spLocks noGrp="1"/>
-          </p:cNvSpPr>
-          <p:nvPr>
-            <p:ph type="ftr" sz="quarter" idx="11"/>
-          </p:nvPr>
-        </p:nvSpPr>
-        <p:spPr/>
-        <p:txBody>
-          <a:bodyPr/>
-          <a:lstStyle/>
-          <a:p>
-            <a:r>
-              <a:rPr lang="en-US"/>
-              <a:t>raysmith@alum.mit.edu</a:t>
-            </a:r>
-            <a:endParaRPr lang="en-US" dirty="0"/>
-          </a:p>
-        </p:txBody>
-      </p:sp>
-      <p:sp>
-        <p:nvSpPr>
-          <p:cNvPr id="6" name="Slide Number Placeholder 5">
-            <a:extLst>
-              <a:ext uri="{FF2B5EF4-FFF2-40B4-BE49-F238E27FC236}">
-                <a16:creationId xmlns:a16="http://schemas.microsoft.com/office/drawing/2014/main" id="{54E7395C-C96B-C82A-58E2-49E4B31B73C9}"/>
-              </a:ext>
-            </a:extLst>
-          </p:cNvPr>
-          <p:cNvSpPr>
-            <a:spLocks noGrp="1"/>
-          </p:cNvSpPr>
-          <p:nvPr>
-            <p:ph type="sldNum" sz="quarter" idx="12"/>
-          </p:nvPr>
-        </p:nvSpPr>
-        <p:spPr/>
-        <p:txBody>
-          <a:bodyPr/>
-          <a:lstStyle/>
-          <a:p>
-            <a:fld id="{6D22F896-40B5-4ADD-8801-0D06FADFA095}" type="slidenum">
-              <a:rPr lang="en-US" smtClean="0"/>
-              <a:t>33</a:t>
-            </a:fld>
-            <a:endParaRPr lang="en-US" dirty="0"/>
-          </a:p>
-        </p:txBody>
-      </p:sp>
-      <p:pic>
-        <p:nvPicPr>
-          <p:cNvPr id="1025" name="Picture 1" descr="2">
-            <a:extLst>
-              <a:ext uri="{FF2B5EF4-FFF2-40B4-BE49-F238E27FC236}">
-                <a16:creationId xmlns:a16="http://schemas.microsoft.com/office/drawing/2014/main" id="{E655AFAE-90EF-81F0-845D-A0C543B6A4BD}"/>
-              </a:ext>
-            </a:extLst>
-          </p:cNvPr>
-          <p:cNvPicPr>
-            <a:picLocks noChangeAspect="1" noChangeArrowheads="1"/>
-          </p:cNvPicPr>
-          <p:nvPr/>
-        </p:nvPicPr>
-        <p:blipFill>
-          <a:blip r:embed="rId2">
-            <a:extLst>
-              <a:ext uri="{28A0092B-C50C-407E-A947-70E740481C1C}">
-                <a14:useLocalDpi xmlns:a14="http://schemas.microsoft.com/office/drawing/2010/main" val="0"/>
-              </a:ext>
-            </a:extLst>
-          </a:blip>
-          <a:srcRect/>
-          <a:stretch>
-            <a:fillRect/>
-          </a:stretch>
-        </p:blipFill>
-        <p:spPr bwMode="auto">
-          <a:xfrm>
-            <a:off x="0" y="0"/>
-            <a:ext cx="133350" cy="219075"/>
-          </a:xfrm>
-          <a:prstGeom prst="rect">
-            <a:avLst/>
-          </a:prstGeom>
-          <a:noFill/>
-          <a:extLst>
-            <a:ext uri="{909E8E84-426E-40DD-AFC4-6F175D3DCCD1}">
-              <a14:hiddenFill xmlns:a14="http://schemas.microsoft.com/office/drawing/2010/main">
-                <a:solidFill>
-                  <a:srgbClr val="FFFFFF"/>
-                </a:solidFill>
-              </a14:hiddenFill>
-            </a:ext>
-          </a:extLst>
-        </p:spPr>
-      </p:pic>
-    </p:spTree>
-    <p:extLst>
-      <p:ext uri="{BB962C8B-B14F-4D97-AF65-F5344CB8AC3E}">
-        <p14:creationId xmlns:p14="http://schemas.microsoft.com/office/powerpoint/2010/main" val="4191648529"/>
-      </p:ext>
-    </p:extLst>
-  </p:cSld>
-  <p:clrMapOvr>
-    <a:masterClrMapping/>
-  </p:clrMapOvr>
-</p:sld>
-</file>
-
-<file path=ppt/slides/slide34.xml><?xml version="1.0" encoding="utf-8"?>
-<p:sld xmlns:a="http://schemas.openxmlformats.org/drawingml/2006/main" xmlns:r="http://schemas.openxmlformats.org/officeDocument/2006/relationships" xmlns:p="http://schemas.openxmlformats.org/presentationml/2006/main">
-  <p:cSld>
-    <p:bg>
-      <p:bgPr>
-        <a:gradFill>
-          <a:gsLst>
-            <a:gs pos="0">
-              <a:schemeClr val="accent4">
-                <a:lumMod val="20000"/>
-                <a:lumOff val="80000"/>
-              </a:schemeClr>
-            </a:gs>
-            <a:gs pos="74000">
-              <a:schemeClr val="accent4">
-                <a:lumMod val="45000"/>
-                <a:lumOff val="55000"/>
-              </a:schemeClr>
-            </a:gs>
-            <a:gs pos="83000">
-              <a:schemeClr val="accent4">
-                <a:lumMod val="45000"/>
-                <a:lumOff val="55000"/>
-              </a:schemeClr>
-            </a:gs>
-            <a:gs pos="100000">
-              <a:schemeClr val="accent4">
-                <a:lumMod val="30000"/>
-                <a:lumOff val="70000"/>
-              </a:schemeClr>
-            </a:gs>
-          </a:gsLst>
-          <a:lin ang="5400000" scaled="1"/>
-        </a:gradFill>
-        <a:effectLst/>
-      </p:bgPr>
-    </p:bg>
-    <p:spTree>
-      <p:nvGrpSpPr>
-        <p:cNvPr id="1" name=""/>
-        <p:cNvGrpSpPr/>
-        <p:nvPr/>
-      </p:nvGrpSpPr>
-      <p:grpSpPr>
-        <a:xfrm>
-          <a:off x="0" y="0"/>
-          <a:ext cx="0" cy="0"/>
-          <a:chOff x="0" y="0"/>
-          <a:chExt cx="0" cy="0"/>
-        </a:xfrm>
-      </p:grpSpPr>
-      <p:sp>
-        <p:nvSpPr>
-          <p:cNvPr id="2" name="Title 1">
-            <a:extLst>
-              <a:ext uri="{FF2B5EF4-FFF2-40B4-BE49-F238E27FC236}">
-                <a16:creationId xmlns:a16="http://schemas.microsoft.com/office/drawing/2014/main" id="{4C738398-DAA7-2BCE-76F4-AF36E34176F5}"/>
-              </a:ext>
-            </a:extLst>
-          </p:cNvPr>
-          <p:cNvSpPr>
-            <a:spLocks noGrp="1"/>
-          </p:cNvSpPr>
-          <p:nvPr>
-            <p:ph type="title"/>
-          </p:nvPr>
-        </p:nvSpPr>
-        <p:spPr/>
-        <p:txBody>
-          <a:bodyPr/>
-          <a:lstStyle/>
-          <a:p>
-            <a:r>
-              <a:rPr lang="en-US" sz="3600" dirty="0">
-                <a:solidFill>
-                  <a:schemeClr val="accent1"/>
-                </a:solidFill>
-              </a:rPr>
-              <a:t>Source Code</a:t>
-            </a:r>
-            <a:endParaRPr lang="en-US" dirty="0"/>
-          </a:p>
-        </p:txBody>
-      </p:sp>
-      <p:sp>
-        <p:nvSpPr>
-          <p:cNvPr id="3" name="Content Placeholder 2">
-            <a:extLst>
-              <a:ext uri="{FF2B5EF4-FFF2-40B4-BE49-F238E27FC236}">
-                <a16:creationId xmlns:a16="http://schemas.microsoft.com/office/drawing/2014/main" id="{0C360948-50A1-2DC8-8408-53BDDAF2B33C}"/>
-              </a:ext>
-            </a:extLst>
-          </p:cNvPr>
-          <p:cNvSpPr>
-            <a:spLocks noGrp="1"/>
-          </p:cNvSpPr>
-          <p:nvPr>
-            <p:ph idx="1"/>
-          </p:nvPr>
-        </p:nvSpPr>
-        <p:spPr>
-          <a:xfrm>
-            <a:off x="550113" y="2051051"/>
-            <a:ext cx="8596668" cy="3880773"/>
-          </a:xfrm>
-        </p:spPr>
-        <p:txBody>
-          <a:bodyPr>
-            <a:noAutofit/>
-          </a:bodyPr>
-          <a:lstStyle/>
-          <a:p>
-            <a:r>
-              <a:rPr lang="en-US" sz="2800" dirty="0">
-                <a:solidFill>
-                  <a:schemeClr val="tx1"/>
-                </a:solidFill>
-              </a:rPr>
-              <a:t>GitHub Project </a:t>
-            </a:r>
-            <a:r>
-              <a:rPr lang="en-US" sz="2800" dirty="0">
-                <a:solidFill>
-                  <a:srgbClr val="00B0F0"/>
-                </a:solidFill>
-              </a:rPr>
-              <a:t>github.com/raysmith619/resource_lib</a:t>
-            </a:r>
-          </a:p>
-          <a:p>
-            <a:pPr marL="457200" lvl="1" indent="0">
-              <a:buNone/>
-            </a:pPr>
-            <a:r>
-              <a:rPr lang="en-US" sz="3400" dirty="0">
-                <a:solidFill>
-                  <a:srgbClr val="00B0F0"/>
-                </a:solidFill>
-              </a:rPr>
-              <a:t>src/ </a:t>
-            </a:r>
-            <a:r>
-              <a:rPr lang="en-US" sz="3400" dirty="0">
-                <a:solidFill>
-                  <a:schemeClr val="tx1"/>
-                </a:solidFill>
-              </a:rPr>
-              <a:t>– source files (Python)</a:t>
-            </a:r>
-          </a:p>
-          <a:p>
-            <a:pPr marL="457200" lvl="1" indent="0">
-              <a:buNone/>
-            </a:pPr>
-            <a:r>
-              <a:rPr lang="en-US" sz="3400" dirty="0">
-                <a:solidFill>
-                  <a:srgbClr val="00B0F0"/>
-                </a:solidFill>
-              </a:rPr>
-              <a:t>README.md </a:t>
-            </a:r>
-            <a:r>
-              <a:rPr lang="en-US" sz="3400" dirty="0">
-                <a:solidFill>
-                  <a:schemeClr val="tx1"/>
-                </a:solidFill>
-              </a:rPr>
-              <a:t>– Short description</a:t>
-            </a:r>
-          </a:p>
-          <a:p>
-            <a:r>
-              <a:rPr lang="en-US" sz="2400" dirty="0">
-                <a:solidFill>
-                  <a:schemeClr val="tx1"/>
-                </a:solidFill>
-              </a:rPr>
-              <a:t>Alternate direction, with discussion</a:t>
-            </a:r>
-          </a:p>
-          <a:p>
-            <a:pPr marL="0" indent="0">
-              <a:buNone/>
-            </a:pPr>
-            <a:r>
-              <a:rPr lang="en-US" sz="2400" b="0" i="0" u="sng" dirty="0">
-                <a:solidFill>
-                  <a:srgbClr val="00B0F0"/>
-                </a:solidFill>
-                <a:effectLst/>
-                <a:latin typeface="-apple-system"/>
-                <a:hlinkClick r:id="rId2">
-                  <a:extLst>
-                    <a:ext uri="{A12FA001-AC4F-418D-AE19-62706E023703}">
-                      <ahyp:hlinkClr xmlns:ahyp="http://schemas.microsoft.com/office/drawing/2018/hyperlinkcolor" val="tx"/>
-                    </a:ext>
-                  </a:extLst>
-                </a:hlinkClick>
-              </a:rPr>
-              <a:t>raysmith619</a:t>
-            </a:r>
-            <a:r>
-              <a:rPr lang="en-US" sz="2400" b="0" i="0" dirty="0">
-                <a:solidFill>
-                  <a:srgbClr val="00B0F0"/>
-                </a:solidFill>
-                <a:effectLst/>
-                <a:latin typeface="-apple-system"/>
-              </a:rPr>
-              <a:t>/</a:t>
-            </a:r>
-            <a:r>
-              <a:rPr lang="en-US" sz="2400" b="1" i="0" u="none" strike="noStrike" dirty="0">
-                <a:solidFill>
-                  <a:srgbClr val="00B0F0"/>
-                </a:solidFill>
-                <a:effectLst/>
-                <a:latin typeface="-apple-system"/>
-                <a:hlinkClick r:id="rId3">
-                  <a:extLst>
-                    <a:ext uri="{A12FA001-AC4F-418D-AE19-62706E023703}">
-                      <ahyp:hlinkClr xmlns:ahyp="http://schemas.microsoft.com/office/drawing/2018/hyperlinkcolor" val="tx"/>
-                    </a:ext>
-                  </a:extLst>
-                </a:hlinkClick>
-              </a:rPr>
-              <a:t>TurtleBraille</a:t>
-            </a:r>
-            <a:br>
-              <a:rPr lang="en-US" sz="3600" dirty="0"/>
-            </a:br>
-            <a:endParaRPr lang="en-US" sz="3600" dirty="0">
-              <a:solidFill>
-                <a:schemeClr val="tx1"/>
-              </a:solidFill>
-            </a:endParaRPr>
-          </a:p>
-        </p:txBody>
-      </p:sp>
-      <p:sp>
-        <p:nvSpPr>
-          <p:cNvPr id="4" name="Date Placeholder 3">
-            <a:extLst>
-              <a:ext uri="{FF2B5EF4-FFF2-40B4-BE49-F238E27FC236}">
-                <a16:creationId xmlns:a16="http://schemas.microsoft.com/office/drawing/2014/main" id="{5EDCC79F-3336-222D-207D-DDBE9A586431}"/>
-              </a:ext>
-            </a:extLst>
-          </p:cNvPr>
-          <p:cNvSpPr>
-            <a:spLocks noGrp="1"/>
-          </p:cNvSpPr>
-          <p:nvPr>
-            <p:ph type="dt" sz="half" idx="10"/>
-          </p:nvPr>
-        </p:nvSpPr>
-        <p:spPr/>
-        <p:txBody>
-          <a:bodyPr/>
-          <a:lstStyle/>
-          <a:p>
-            <a:fld id="{A7119916-CD40-456D-ABE3-55F8822671F7}" type="datetime1">
-              <a:rPr lang="en-US" smtClean="0"/>
-              <a:t>1/19/2023</a:t>
-            </a:fld>
-            <a:endParaRPr lang="en-US" dirty="0"/>
-          </a:p>
-        </p:txBody>
-      </p:sp>
-      <p:sp>
-        <p:nvSpPr>
-          <p:cNvPr id="5" name="Footer Placeholder 4">
-            <a:extLst>
-              <a:ext uri="{FF2B5EF4-FFF2-40B4-BE49-F238E27FC236}">
-                <a16:creationId xmlns:a16="http://schemas.microsoft.com/office/drawing/2014/main" id="{009CCD2F-A4CE-60DA-E7BA-37B3D06C1ADD}"/>
-              </a:ext>
-            </a:extLst>
-          </p:cNvPr>
-          <p:cNvSpPr>
-            <a:spLocks noGrp="1"/>
-          </p:cNvSpPr>
-          <p:nvPr>
-            <p:ph type="ftr" sz="quarter" idx="11"/>
-          </p:nvPr>
-        </p:nvSpPr>
-        <p:spPr/>
-        <p:txBody>
-          <a:bodyPr/>
-          <a:lstStyle/>
-          <a:p>
-            <a:r>
-              <a:rPr lang="en-US"/>
-              <a:t>raysmith@alum.mit.edu</a:t>
-            </a:r>
-            <a:endParaRPr lang="en-US" dirty="0"/>
-          </a:p>
-        </p:txBody>
-      </p:sp>
-      <p:sp>
-        <p:nvSpPr>
-          <p:cNvPr id="6" name="Slide Number Placeholder 5">
-            <a:extLst>
-              <a:ext uri="{FF2B5EF4-FFF2-40B4-BE49-F238E27FC236}">
-                <a16:creationId xmlns:a16="http://schemas.microsoft.com/office/drawing/2014/main" id="{54E7395C-C96B-C82A-58E2-49E4B31B73C9}"/>
-              </a:ext>
-            </a:extLst>
-          </p:cNvPr>
-          <p:cNvSpPr>
-            <a:spLocks noGrp="1"/>
-          </p:cNvSpPr>
-          <p:nvPr>
-            <p:ph type="sldNum" sz="quarter" idx="12"/>
-          </p:nvPr>
-        </p:nvSpPr>
-        <p:spPr/>
-        <p:txBody>
-          <a:bodyPr/>
-          <a:lstStyle/>
-          <a:p>
-            <a:fld id="{6D22F896-40B5-4ADD-8801-0D06FADFA095}" type="slidenum">
-              <a:rPr lang="en-US" smtClean="0"/>
-              <a:t>34</a:t>
-            </a:fld>
-            <a:endParaRPr lang="en-US" dirty="0"/>
-          </a:p>
-        </p:txBody>
-      </p:sp>
-      <p:pic>
-        <p:nvPicPr>
-          <p:cNvPr id="1025" name="Picture 1" descr="2">
-            <a:extLst>
-              <a:ext uri="{FF2B5EF4-FFF2-40B4-BE49-F238E27FC236}">
-                <a16:creationId xmlns:a16="http://schemas.microsoft.com/office/drawing/2014/main" id="{E655AFAE-90EF-81F0-845D-A0C543B6A4BD}"/>
-              </a:ext>
-            </a:extLst>
-          </p:cNvPr>
-          <p:cNvPicPr>
-            <a:picLocks noChangeAspect="1" noChangeArrowheads="1"/>
-          </p:cNvPicPr>
-          <p:nvPr/>
-        </p:nvPicPr>
-        <p:blipFill>
-          <a:blip r:embed="rId4">
-            <a:extLst>
-              <a:ext uri="{28A0092B-C50C-407E-A947-70E740481C1C}">
-                <a14:useLocalDpi xmlns:a14="http://schemas.microsoft.com/office/drawing/2010/main" val="0"/>
-              </a:ext>
-            </a:extLst>
-          </a:blip>
-          <a:srcRect/>
-          <a:stretch>
-            <a:fillRect/>
-          </a:stretch>
-        </p:blipFill>
-        <p:spPr bwMode="auto">
-          <a:xfrm>
-            <a:off x="0" y="0"/>
-            <a:ext cx="133350" cy="219075"/>
-          </a:xfrm>
-          <a:prstGeom prst="rect">
-            <a:avLst/>
-          </a:prstGeom>
-          <a:noFill/>
-          <a:extLst>
-            <a:ext uri="{909E8E84-426E-40DD-AFC4-6F175D3DCCD1}">
-              <a14:hiddenFill xmlns:a14="http://schemas.microsoft.com/office/drawing/2010/main">
-                <a:solidFill>
-                  <a:srgbClr val="FFFFFF"/>
-                </a:solidFill>
-              </a14:hiddenFill>
-            </a:ext>
-          </a:extLst>
-        </p:spPr>
-      </p:pic>
-    </p:spTree>
-    <p:extLst>
-      <p:ext uri="{BB962C8B-B14F-4D97-AF65-F5344CB8AC3E}">
-        <p14:creationId xmlns:p14="http://schemas.microsoft.com/office/powerpoint/2010/main" val="4289353309"/>
-      </p:ext>
-    </p:extLst>
-  </p:cSld>
-  <p:clrMapOvr>
-    <a:masterClrMapping/>
-  </p:clrMapOvr>
-</p:sld>
-</file>
-
-<file path=ppt/slides/slide35.xml><?xml version="1.0" encoding="utf-8"?>
-<p:sld xmlns:a="http://schemas.openxmlformats.org/drawingml/2006/main" xmlns:r="http://schemas.openxmlformats.org/officeDocument/2006/relationships" xmlns:p="http://schemas.openxmlformats.org/presentationml/2006/main">
-  <p:cSld>
-    <p:bg>
-      <p:bgPr>
-        <a:gradFill>
-          <a:gsLst>
-            <a:gs pos="0">
-              <a:schemeClr val="accent4">
-                <a:lumMod val="20000"/>
-                <a:lumOff val="80000"/>
-              </a:schemeClr>
-            </a:gs>
-            <a:gs pos="74000">
-              <a:schemeClr val="accent4">
-                <a:lumMod val="45000"/>
-                <a:lumOff val="55000"/>
-              </a:schemeClr>
-            </a:gs>
-            <a:gs pos="83000">
-              <a:schemeClr val="accent4">
-                <a:lumMod val="45000"/>
-                <a:lumOff val="55000"/>
-              </a:schemeClr>
-            </a:gs>
-            <a:gs pos="100000">
-              <a:schemeClr val="accent4">
-                <a:lumMod val="30000"/>
-                <a:lumOff val="70000"/>
-              </a:schemeClr>
-            </a:gs>
-          </a:gsLst>
-          <a:lin ang="5400000" scaled="1"/>
-        </a:gradFill>
-        <a:effectLst/>
-      </p:bgPr>
-    </p:bg>
-    <p:spTree>
-      <p:nvGrpSpPr>
-        <p:cNvPr id="1" name=""/>
-        <p:cNvGrpSpPr/>
-        <p:nvPr/>
-      </p:nvGrpSpPr>
-      <p:grpSpPr>
-        <a:xfrm>
-          <a:off x="0" y="0"/>
-          <a:ext cx="0" cy="0"/>
-          <a:chOff x="0" y="0"/>
-          <a:chExt cx="0" cy="0"/>
-        </a:xfrm>
-      </p:grpSpPr>
-      <p:sp>
-        <p:nvSpPr>
-          <p:cNvPr id="2" name="Title 1">
-            <a:extLst>
-              <a:ext uri="{FF2B5EF4-FFF2-40B4-BE49-F238E27FC236}">
                 <a16:creationId xmlns:a16="http://schemas.microsoft.com/office/drawing/2014/main" id="{F7E90694-AA7F-451B-A875-1D23D1FDBA32}"/>
               </a:ext>
             </a:extLst>
@@ -18710,7 +17123,7 @@
                 <a:tabLst/>
                 <a:defRPr/>
               </a:pPr>
-              <a:t>1/19/2023</a:t>
+              <a:t>9/11/2024</a:t>
             </a:fld>
             <a:endParaRPr kumimoji="0" lang="en-US" sz="900" b="0" i="0" u="none" strike="noStrike" kern="1200" cap="none" spc="0" normalizeH="0" baseline="0" noProof="0" dirty="0">
               <a:ln>
@@ -18861,7 +17274,7 @@
                 <a:tabLst/>
                 <a:defRPr/>
               </a:pPr>
-              <a:t>35</a:t>
+              <a:t>30</a:t>
             </a:fld>
             <a:endParaRPr kumimoji="0" lang="en-US" sz="900" b="0" i="0" u="none" strike="noStrike" kern="1200" cap="none" spc="0" normalizeH="0" baseline="0" noProof="0" dirty="0">
               <a:ln>
@@ -19093,7 +17506,7 @@
                 <a:tabLst/>
                 <a:defRPr/>
               </a:pPr>
-              <a:t>1/19/2023</a:t>
+              <a:t>9/11/2024</a:t>
             </a:fld>
             <a:endParaRPr kumimoji="0" lang="en-US" sz="900" b="0" i="0" u="none" strike="noStrike" kern="1200" cap="none" spc="0" normalizeH="0" baseline="0" noProof="0" dirty="0">
               <a:ln>
@@ -19469,7 +17882,7 @@
                 <a:tabLst/>
                 <a:defRPr/>
               </a:pPr>
-              <a:t>1/19/2023</a:t>
+              <a:t>9/11/2024</a:t>
             </a:fld>
             <a:endParaRPr kumimoji="0" lang="en-US" sz="900" b="0" i="0" u="none" strike="noStrike" kern="1200" cap="none" spc="0" normalizeH="0" baseline="0" noProof="0" dirty="0">
               <a:ln>
@@ -19855,7 +18268,7 @@
                 <a:tabLst/>
                 <a:defRPr/>
               </a:pPr>
-              <a:t>1/19/2023</a:t>
+              <a:t>9/11/2024</a:t>
             </a:fld>
             <a:endParaRPr kumimoji="0" lang="en-US" sz="900" b="0" i="0" u="none" strike="noStrike" kern="1200" cap="none" spc="0" normalizeH="0" baseline="0" noProof="0" dirty="0">
               <a:ln>
@@ -20250,7 +18663,7 @@
                 <a:tabLst/>
                 <a:defRPr/>
               </a:pPr>
-              <a:t>1/19/2023</a:t>
+              <a:t>9/11/2024</a:t>
             </a:fld>
             <a:endParaRPr kumimoji="0" lang="en-US" sz="900" b="0" i="0" u="none" strike="noStrike" kern="1200" cap="none" spc="0" normalizeH="0" baseline="0" noProof="0" dirty="0">
               <a:ln>
@@ -20540,7 +18953,7 @@
         </p:spPr>
         <p:txBody>
           <a:bodyPr>
-            <a:normAutofit fontScale="70000" lnSpcReduction="20000"/>
+            <a:normAutofit fontScale="77500" lnSpcReduction="20000"/>
           </a:bodyPr>
           <a:lstStyle/>
           <a:p>
@@ -20576,7 +18989,7 @@
                 <a:latin typeface="Courier New" panose="02070309020205020404" pitchFamily="49" charset="0"/>
                 <a:cs typeface="Courier New" panose="02070309020205020404" pitchFamily="49" charset="0"/>
               </a:rPr>
-              <a:t>from turtle_braille_link import * # </a:t>
+              <a:t>from turtle_braille import * # </a:t>
             </a:r>
             <a:r>
               <a:rPr lang="en-US" sz="2900" i="1" dirty="0">
@@ -20735,7 +19148,7 @@
                 <a:tabLst/>
                 <a:defRPr/>
               </a:pPr>
-              <a:t>1/19/2023</a:t>
+              <a:t>9/11/2024</a:t>
             </a:fld>
             <a:endParaRPr kumimoji="0" lang="en-US" sz="900" b="0" i="0" u="none" strike="noStrike" kern="1200" cap="none" spc="0" normalizeH="0" baseline="0" noProof="0" dirty="0">
               <a:ln>
@@ -21077,7 +19490,7 @@
           <a:p>
             <a:fld id="{A7119916-CD40-456D-ABE3-55F8822671F7}" type="datetime1">
               <a:rPr lang="en-US" smtClean="0"/>
-              <a:t>1/19/2023</a:t>
+              <a:t>9/11/2024</a:t>
             </a:fld>
             <a:endParaRPr lang="en-US" dirty="0"/>
           </a:p>
